--- a/plots/workflow.pptx
+++ b/plots/workflow.pptx
@@ -285,7 +285,7 @@
           <a:p>
             <a:fld id="{727024B5-A3DE-144E-AA20-5DAC5431DA34}" type="slidenum">
               <a:rPr lang="en-US" smtClean="0"/>
-              <a:t>‹Nr.›</a:t>
+              <a:t>‹#›</a:t>
             </a:fld>
             <a:endParaRPr lang="en-US"/>
           </a:p>
@@ -455,7 +455,7 @@
           <a:p>
             <a:fld id="{727024B5-A3DE-144E-AA20-5DAC5431DA34}" type="slidenum">
               <a:rPr lang="en-US" smtClean="0"/>
-              <a:t>‹Nr.›</a:t>
+              <a:t>‹#›</a:t>
             </a:fld>
             <a:endParaRPr lang="en-US"/>
           </a:p>
@@ -635,7 +635,7 @@
           <a:p>
             <a:fld id="{727024B5-A3DE-144E-AA20-5DAC5431DA34}" type="slidenum">
               <a:rPr lang="en-US" smtClean="0"/>
-              <a:t>‹Nr.›</a:t>
+              <a:t>‹#›</a:t>
             </a:fld>
             <a:endParaRPr lang="en-US"/>
           </a:p>
@@ -805,7 +805,7 @@
           <a:p>
             <a:fld id="{727024B5-A3DE-144E-AA20-5DAC5431DA34}" type="slidenum">
               <a:rPr lang="en-US" smtClean="0"/>
-              <a:t>‹Nr.›</a:t>
+              <a:t>‹#›</a:t>
             </a:fld>
             <a:endParaRPr lang="en-US"/>
           </a:p>
@@ -1049,7 +1049,7 @@
           <a:p>
             <a:fld id="{727024B5-A3DE-144E-AA20-5DAC5431DA34}" type="slidenum">
               <a:rPr lang="en-US" smtClean="0"/>
-              <a:t>‹Nr.›</a:t>
+              <a:t>‹#›</a:t>
             </a:fld>
             <a:endParaRPr lang="en-US"/>
           </a:p>
@@ -1281,7 +1281,7 @@
           <a:p>
             <a:fld id="{727024B5-A3DE-144E-AA20-5DAC5431DA34}" type="slidenum">
               <a:rPr lang="en-US" smtClean="0"/>
-              <a:t>‹Nr.›</a:t>
+              <a:t>‹#›</a:t>
             </a:fld>
             <a:endParaRPr lang="en-US"/>
           </a:p>
@@ -1648,7 +1648,7 @@
           <a:p>
             <a:fld id="{727024B5-A3DE-144E-AA20-5DAC5431DA34}" type="slidenum">
               <a:rPr lang="en-US" smtClean="0"/>
-              <a:t>‹Nr.›</a:t>
+              <a:t>‹#›</a:t>
             </a:fld>
             <a:endParaRPr lang="en-US"/>
           </a:p>
@@ -1766,7 +1766,7 @@
           <a:p>
             <a:fld id="{727024B5-A3DE-144E-AA20-5DAC5431DA34}" type="slidenum">
               <a:rPr lang="en-US" smtClean="0"/>
-              <a:t>‹Nr.›</a:t>
+              <a:t>‹#›</a:t>
             </a:fld>
             <a:endParaRPr lang="en-US"/>
           </a:p>
@@ -1861,7 +1861,7 @@
           <a:p>
             <a:fld id="{727024B5-A3DE-144E-AA20-5DAC5431DA34}" type="slidenum">
               <a:rPr lang="en-US" smtClean="0"/>
-              <a:t>‹Nr.›</a:t>
+              <a:t>‹#›</a:t>
             </a:fld>
             <a:endParaRPr lang="en-US"/>
           </a:p>
@@ -2138,7 +2138,7 @@
           <a:p>
             <a:fld id="{727024B5-A3DE-144E-AA20-5DAC5431DA34}" type="slidenum">
               <a:rPr lang="en-US" smtClean="0"/>
-              <a:t>‹Nr.›</a:t>
+              <a:t>‹#›</a:t>
             </a:fld>
             <a:endParaRPr lang="en-US"/>
           </a:p>
@@ -2395,7 +2395,7 @@
           <a:p>
             <a:fld id="{727024B5-A3DE-144E-AA20-5DAC5431DA34}" type="slidenum">
               <a:rPr lang="en-US" smtClean="0"/>
-              <a:t>‹Nr.›</a:t>
+              <a:t>‹#›</a:t>
             </a:fld>
             <a:endParaRPr lang="en-US"/>
           </a:p>
@@ -2644,7 +2644,7 @@
           <a:p>
             <a:fld id="{727024B5-A3DE-144E-AA20-5DAC5431DA34}" type="slidenum">
               <a:rPr lang="en-US" smtClean="0"/>
-              <a:t>‹Nr.›</a:t>
+              <a:t>‹#›</a:t>
             </a:fld>
             <a:endParaRPr lang="en-US"/>
           </a:p>
@@ -2985,7 +2985,7 @@
         </p:nvSpPr>
         <p:spPr>
           <a:xfrm>
-            <a:off x="1217493" y="786580"/>
+            <a:off x="1176525" y="799124"/>
             <a:ext cx="2488548" cy="5568219"/>
           </a:xfrm>
           <a:prstGeom prst="rect">
@@ -3041,8 +3041,8 @@
         </p:nvSpPr>
         <p:spPr>
           <a:xfrm>
-            <a:off x="1706103" y="5138856"/>
-            <a:ext cx="471948" cy="1894257"/>
+            <a:off x="1450331" y="5014602"/>
+            <a:ext cx="471948" cy="2048145"/>
           </a:xfrm>
           <a:prstGeom prst="downArrow">
             <a:avLst/>
@@ -3099,7 +3099,7 @@
         <p:spPr>
           <a:xfrm>
             <a:off x="1222495" y="6656208"/>
-            <a:ext cx="7091811" cy="1449534"/>
+            <a:ext cx="7091811" cy="1767450"/>
           </a:xfrm>
           <a:prstGeom prst="rect">
             <a:avLst/>
@@ -3249,7 +3249,7 @@
               <a:rPr lang="en-US" sz="1000" dirty="0">
                 <a:latin typeface="Aptos Narrow" panose="020B0004020202020204" pitchFamily="34" charset="0"/>
               </a:rPr>
-              <a:t>Design a model that matches the research question and fulfills any domain-specific requirements, for example:</a:t>
+              <a:t>Design a model that matches the research question and fulfills domain-specific requirements, for example:</a:t>
             </a:r>
           </a:p>
           <a:p>
@@ -3741,8 +3741,8 @@
         </p:nvSpPr>
         <p:spPr>
           <a:xfrm>
-            <a:off x="1763489" y="7039785"/>
-            <a:ext cx="4774980" cy="831611"/>
+            <a:off x="1450331" y="7120234"/>
+            <a:ext cx="5743946" cy="1224642"/>
           </a:xfrm>
           <a:prstGeom prst="rect">
             <a:avLst/>
@@ -3789,7 +3789,7 @@
               <a:rPr lang="en-US" sz="1000" dirty="0">
                 <a:latin typeface="Aptos Narrow" panose="020B0004020202020204" pitchFamily="34" charset="0"/>
               </a:rPr>
-              <a:t>quantify uncertainty (delta method, bootstrap, simulation-based inference, Bayesian inference)</a:t>
+              <a:t>Quantify uncertainty (delta method, bootstrap, simulation, Bayesian posterior)</a:t>
             </a:r>
           </a:p>
           <a:p>
@@ -3801,8 +3801,65 @@
               <a:rPr lang="en-US" sz="1000" dirty="0">
                 <a:latin typeface="Aptos Narrow" panose="020B0004020202020204" pitchFamily="34" charset="0"/>
               </a:rPr>
-              <a:t>derive null or equivalence tests on any derived quantities</a:t>
-            </a:r>
+              <a:t>Conduct null hypothesis or equivalence tests on coefficients or target quantities</a:t>
+            </a:r>
+          </a:p>
+          <a:p>
+            <a:pPr marL="171450" indent="-171450">
+              <a:buFontTx/>
+              <a:buChar char="-"/>
+            </a:pPr>
+            <a:r>
+              <a:rPr lang="en-US" sz="1000" dirty="0">
+                <a:latin typeface="Aptos Narrow" panose="020B0004020202020204" pitchFamily="34" charset="0"/>
+              </a:rPr>
+              <a:t>Test interactions</a:t>
+            </a:r>
+          </a:p>
+          <a:p>
+            <a:pPr marL="628650" lvl="1" indent="-171450">
+              <a:buFontTx/>
+              <a:buChar char="-"/>
+            </a:pPr>
+            <a:r>
+              <a:rPr lang="en-US" sz="1000" dirty="0">
+                <a:latin typeface="Aptos Narrow" panose="020B0004020202020204" pitchFamily="34" charset="0"/>
+              </a:rPr>
+              <a:t>Is the expected outcome higher in group A than in group B?</a:t>
+            </a:r>
+          </a:p>
+          <a:p>
+            <a:pPr marL="628650" lvl="1" indent="-171450">
+              <a:buFontTx/>
+              <a:buChar char="-"/>
+            </a:pPr>
+            <a:r>
+              <a:rPr lang="en-US" sz="1000" dirty="0">
+                <a:latin typeface="Aptos Narrow" panose="020B0004020202020204" pitchFamily="34" charset="0"/>
+              </a:rPr>
+              <a:t>Is the effect or association stronger for some individuals?</a:t>
+            </a:r>
+          </a:p>
+          <a:p>
+            <a:pPr marL="628650" lvl="1" indent="-171450">
+              <a:buFontTx/>
+              <a:buChar char="-"/>
+            </a:pPr>
+            <a:r>
+              <a:rPr lang="en-US" sz="1000" dirty="0">
+                <a:latin typeface="Aptos Narrow" panose="020B0004020202020204" pitchFamily="34" charset="0"/>
+              </a:rPr>
+              <a:t>…</a:t>
+            </a:r>
+          </a:p>
+          <a:p>
+            <a:pPr marL="171450" indent="-171450">
+              <a:buFontTx/>
+              <a:buChar char="-"/>
+            </a:pPr>
+            <a:endParaRPr lang="en-US" sz="1000" dirty="0">
+              <a:latin typeface="Aptos Narrow" panose="020B0004020202020204" pitchFamily="34" charset="0"/>
+            </a:endParaRPr>
           </a:p>
         </p:txBody>
       </p:sp>
@@ -4417,7 +4474,7 @@
         <p:spPr>
           <a:xfrm>
             <a:off x="1280271" y="4584858"/>
-            <a:ext cx="2317770" cy="553998"/>
+            <a:ext cx="2187343" cy="400110"/>
           </a:xfrm>
           <a:prstGeom prst="rect">
             <a:avLst/>
@@ -4434,7 +4491,7 @@
               <a:rPr lang="en-US" sz="1000" i="1" dirty="0">
                 <a:latin typeface="Aptos Narrow" panose="020B0004020202020204" pitchFamily="34" charset="0"/>
               </a:rPr>
-              <a:t>These steps are the same as in the “standard workflow” in which researchers move on to directly interpret coefficients. </a:t>
+              <a:t>In the “standard” workflow, we study the estimated coefficients directly.</a:t>
             </a:r>
           </a:p>
         </p:txBody>
@@ -4511,8 +4568,8 @@
         </p:nvSpPr>
         <p:spPr>
           <a:xfrm>
-            <a:off x="1301183" y="5244283"/>
-            <a:ext cx="2345484" cy="861774"/>
+            <a:off x="1717431" y="5370593"/>
+            <a:ext cx="1893126" cy="707886"/>
           </a:xfrm>
           <a:prstGeom prst="rect">
             <a:avLst/>
@@ -4525,6 +4582,7 @@
           </a:bodyPr>
           <a:lstStyle/>
           <a:p>
+            <a:pPr algn="r"/>
             <a:endParaRPr lang="en-US" sz="1000" i="1" dirty="0">
               <a:latin typeface="Aptos Narrow" panose="020B0004020202020204" pitchFamily="34" charset="0"/>
             </a:endParaRPr>
@@ -4535,7 +4593,7 @@
               <a:rPr lang="en-US" sz="1000" i="1" dirty="0">
                 <a:latin typeface="Aptos Narrow" panose="020B0004020202020204" pitchFamily="34" charset="0"/>
               </a:rPr>
-              <a:t>The “prediction machines workflow”  diverges at this point, as the model is interpreted in a with the help of target quantities.</a:t>
+              <a:t>In the “prediction machines” workflow, we use the coefficients to compute target quantities.</a:t>
             </a:r>
           </a:p>
         </p:txBody>

--- a/plots/workflow.pptx
+++ b/plots/workflow.pptx
@@ -2,12 +2,15 @@
 <file path=ppt/presentation.xml><?xml version="1.0" encoding="utf-8"?>
 <p:presentation xmlns:a="http://schemas.openxmlformats.org/drawingml/2006/main" xmlns:r="http://schemas.openxmlformats.org/officeDocument/2006/relationships" xmlns:p="http://schemas.openxmlformats.org/presentationml/2006/main" saveSubsetFonts="1" autoCompressPictures="0">
   <p:sldMasterIdLst>
-    <p:sldMasterId id="2147483684" r:id="rId1"/>
+    <p:sldMasterId id="2147483768" r:id="rId1"/>
   </p:sldMasterIdLst>
+  <p:notesMasterIdLst>
+    <p:notesMasterId r:id="rId3"/>
+  </p:notesMasterIdLst>
   <p:sldIdLst>
     <p:sldId id="256" r:id="rId2"/>
   </p:sldIdLst>
-  <p:sldSz cx="8999538" cy="9144000"/>
+  <p:sldSz cx="13449300" cy="14785975"/>
   <p:notesSz cx="6858000" cy="9144000"/>
   <p:defaultTextStyle>
     <a:defPPr>
@@ -112,6 +115,445 @@
 </p:presentation>
 </file>
 
+<file path=ppt/notesMasters/notesMaster1.xml><?xml version="1.0" encoding="utf-8"?>
+<p:notesMaster xmlns:a="http://schemas.openxmlformats.org/drawingml/2006/main" xmlns:r="http://schemas.openxmlformats.org/officeDocument/2006/relationships" xmlns:p="http://schemas.openxmlformats.org/presentationml/2006/main">
+  <p:cSld>
+    <p:bg>
+      <p:bgRef idx="1001">
+        <a:schemeClr val="bg1"/>
+      </p:bgRef>
+    </p:bg>
+    <p:spTree>
+      <p:nvGrpSpPr>
+        <p:cNvPr id="1" name=""/>
+        <p:cNvGrpSpPr/>
+        <p:nvPr/>
+      </p:nvGrpSpPr>
+      <p:grpSpPr>
+        <a:xfrm>
+          <a:off x="0" y="0"/>
+          <a:ext cx="0" cy="0"/>
+          <a:chOff x="0" y="0"/>
+          <a:chExt cx="0" cy="0"/>
+        </a:xfrm>
+      </p:grpSpPr>
+      <p:sp>
+        <p:nvSpPr>
+          <p:cNvPr id="2" name="Kopfzeilenplatzhalter 1"/>
+          <p:cNvSpPr>
+            <a:spLocks noGrp="1"/>
+          </p:cNvSpPr>
+          <p:nvPr>
+            <p:ph type="hdr" sz="quarter"/>
+          </p:nvPr>
+        </p:nvSpPr>
+        <p:spPr>
+          <a:xfrm>
+            <a:off x="0" y="0"/>
+            <a:ext cx="2971800" cy="458788"/>
+          </a:xfrm>
+          <a:prstGeom prst="rect">
+            <a:avLst/>
+          </a:prstGeom>
+        </p:spPr>
+        <p:txBody>
+          <a:bodyPr vert="horz" lIns="91440" tIns="45720" rIns="91440" bIns="45720" rtlCol="0"/>
+          <a:lstStyle>
+            <a:lvl1pPr algn="l">
+              <a:defRPr sz="1200"/>
+            </a:lvl1pPr>
+          </a:lstStyle>
+          <a:p>
+            <a:endParaRPr lang="en-US"/>
+          </a:p>
+        </p:txBody>
+      </p:sp>
+      <p:sp>
+        <p:nvSpPr>
+          <p:cNvPr id="3" name="Datumsplatzhalter 2"/>
+          <p:cNvSpPr>
+            <a:spLocks noGrp="1"/>
+          </p:cNvSpPr>
+          <p:nvPr>
+            <p:ph type="dt" idx="1"/>
+          </p:nvPr>
+        </p:nvSpPr>
+        <p:spPr>
+          <a:xfrm>
+            <a:off x="3884613" y="0"/>
+            <a:ext cx="2971800" cy="458788"/>
+          </a:xfrm>
+          <a:prstGeom prst="rect">
+            <a:avLst/>
+          </a:prstGeom>
+        </p:spPr>
+        <p:txBody>
+          <a:bodyPr vert="horz" lIns="91440" tIns="45720" rIns="91440" bIns="45720" rtlCol="0"/>
+          <a:lstStyle>
+            <a:lvl1pPr algn="r">
+              <a:defRPr sz="1200"/>
+            </a:lvl1pPr>
+          </a:lstStyle>
+          <a:p>
+            <a:fld id="{F3AA5A4F-F9CE-8347-B171-60E4EE1D10A3}" type="datetimeFigureOut">
+              <a:rPr lang="en-US" smtClean="0"/>
+              <a:t>1/12/26</a:t>
+            </a:fld>
+            <a:endParaRPr lang="en-US"/>
+          </a:p>
+        </p:txBody>
+      </p:sp>
+      <p:sp>
+        <p:nvSpPr>
+          <p:cNvPr id="4" name="Folienbildplatzhalter 3"/>
+          <p:cNvSpPr>
+            <a:spLocks noGrp="1" noRot="1" noChangeAspect="1"/>
+          </p:cNvSpPr>
+          <p:nvPr>
+            <p:ph type="sldImg" idx="2"/>
+          </p:nvPr>
+        </p:nvSpPr>
+        <p:spPr>
+          <a:xfrm>
+            <a:off x="2025650" y="1143000"/>
+            <a:ext cx="2806700" cy="3086100"/>
+          </a:xfrm>
+          <a:prstGeom prst="rect">
+            <a:avLst/>
+          </a:prstGeom>
+          <a:noFill/>
+          <a:ln w="12700">
+            <a:solidFill>
+              <a:prstClr val="black"/>
+            </a:solidFill>
+          </a:ln>
+        </p:spPr>
+        <p:txBody>
+          <a:bodyPr vert="horz" lIns="91440" tIns="45720" rIns="91440" bIns="45720" rtlCol="0" anchor="ctr"/>
+          <a:lstStyle/>
+          <a:p>
+            <a:endParaRPr lang="en-US"/>
+          </a:p>
+        </p:txBody>
+      </p:sp>
+      <p:sp>
+        <p:nvSpPr>
+          <p:cNvPr id="5" name="Notizenplatzhalter 4"/>
+          <p:cNvSpPr>
+            <a:spLocks noGrp="1"/>
+          </p:cNvSpPr>
+          <p:nvPr>
+            <p:ph type="body" sz="quarter" idx="3"/>
+          </p:nvPr>
+        </p:nvSpPr>
+        <p:spPr>
+          <a:xfrm>
+            <a:off x="685800" y="4400550"/>
+            <a:ext cx="5486400" cy="3600450"/>
+          </a:xfrm>
+          <a:prstGeom prst="rect">
+            <a:avLst/>
+          </a:prstGeom>
+        </p:spPr>
+        <p:txBody>
+          <a:bodyPr vert="horz" lIns="91440" tIns="45720" rIns="91440" bIns="45720" rtlCol="0"/>
+          <a:lstStyle/>
+          <a:p>
+            <a:pPr lvl="0"/>
+            <a:r>
+              <a:rPr lang="de-DE"/>
+              <a:t>Mastertextformat bearbeiten</a:t>
+            </a:r>
+          </a:p>
+          <a:p>
+            <a:pPr lvl="1"/>
+            <a:r>
+              <a:rPr lang="de-DE"/>
+              <a:t>Zweite Ebene</a:t>
+            </a:r>
+          </a:p>
+          <a:p>
+            <a:pPr lvl="2"/>
+            <a:r>
+              <a:rPr lang="de-DE"/>
+              <a:t>Dritte Ebene</a:t>
+            </a:r>
+          </a:p>
+          <a:p>
+            <a:pPr lvl="3"/>
+            <a:r>
+              <a:rPr lang="de-DE"/>
+              <a:t>Vierte Ebene</a:t>
+            </a:r>
+          </a:p>
+          <a:p>
+            <a:pPr lvl="4"/>
+            <a:r>
+              <a:rPr lang="de-DE"/>
+              <a:t>Fünfte Ebene</a:t>
+            </a:r>
+            <a:endParaRPr lang="en-US"/>
+          </a:p>
+        </p:txBody>
+      </p:sp>
+      <p:sp>
+        <p:nvSpPr>
+          <p:cNvPr id="6" name="Fußzeilenplatzhalter 5"/>
+          <p:cNvSpPr>
+            <a:spLocks noGrp="1"/>
+          </p:cNvSpPr>
+          <p:nvPr>
+            <p:ph type="ftr" sz="quarter" idx="4"/>
+          </p:nvPr>
+        </p:nvSpPr>
+        <p:spPr>
+          <a:xfrm>
+            <a:off x="0" y="8685213"/>
+            <a:ext cx="2971800" cy="458787"/>
+          </a:xfrm>
+          <a:prstGeom prst="rect">
+            <a:avLst/>
+          </a:prstGeom>
+        </p:spPr>
+        <p:txBody>
+          <a:bodyPr vert="horz" lIns="91440" tIns="45720" rIns="91440" bIns="45720" rtlCol="0" anchor="b"/>
+          <a:lstStyle>
+            <a:lvl1pPr algn="l">
+              <a:defRPr sz="1200"/>
+            </a:lvl1pPr>
+          </a:lstStyle>
+          <a:p>
+            <a:endParaRPr lang="en-US"/>
+          </a:p>
+        </p:txBody>
+      </p:sp>
+      <p:sp>
+        <p:nvSpPr>
+          <p:cNvPr id="7" name="Foliennummernplatzhalter 6"/>
+          <p:cNvSpPr>
+            <a:spLocks noGrp="1"/>
+          </p:cNvSpPr>
+          <p:nvPr>
+            <p:ph type="sldNum" sz="quarter" idx="5"/>
+          </p:nvPr>
+        </p:nvSpPr>
+        <p:spPr>
+          <a:xfrm>
+            <a:off x="3884613" y="8685213"/>
+            <a:ext cx="2971800" cy="458787"/>
+          </a:xfrm>
+          <a:prstGeom prst="rect">
+            <a:avLst/>
+          </a:prstGeom>
+        </p:spPr>
+        <p:txBody>
+          <a:bodyPr vert="horz" lIns="91440" tIns="45720" rIns="91440" bIns="45720" rtlCol="0" anchor="b"/>
+          <a:lstStyle>
+            <a:lvl1pPr algn="r">
+              <a:defRPr sz="1200"/>
+            </a:lvl1pPr>
+          </a:lstStyle>
+          <a:p>
+            <a:fld id="{B03EF438-B9BE-7D40-9CFB-BAFF628B94D9}" type="slidenum">
+              <a:rPr lang="en-US" smtClean="0"/>
+              <a:t>‹Nr.›</a:t>
+            </a:fld>
+            <a:endParaRPr lang="en-US"/>
+          </a:p>
+        </p:txBody>
+      </p:sp>
+    </p:spTree>
+    <p:extLst>
+      <p:ext uri="{BB962C8B-B14F-4D97-AF65-F5344CB8AC3E}">
+        <p14:creationId xmlns:p14="http://schemas.microsoft.com/office/powerpoint/2010/main" val="4116945116"/>
+      </p:ext>
+    </p:extLst>
+  </p:cSld>
+  <p:clrMap bg1="lt1" tx1="dk1" bg2="lt2" tx2="dk2" accent1="accent1" accent2="accent2" accent3="accent3" accent4="accent4" accent5="accent5" accent6="accent6" hlink="hlink" folHlink="folHlink"/>
+  <p:notesStyle>
+    <a:lvl1pPr marL="0" algn="l" defTabSz="914400" rtl="0" eaLnBrk="1" latinLnBrk="0" hangingPunct="1">
+      <a:defRPr sz="1200" kern="1200">
+        <a:solidFill>
+          <a:schemeClr val="tx1"/>
+        </a:solidFill>
+        <a:latin typeface="+mn-lt"/>
+        <a:ea typeface="+mn-ea"/>
+        <a:cs typeface="+mn-cs"/>
+      </a:defRPr>
+    </a:lvl1pPr>
+    <a:lvl2pPr marL="457200" algn="l" defTabSz="914400" rtl="0" eaLnBrk="1" latinLnBrk="0" hangingPunct="1">
+      <a:defRPr sz="1200" kern="1200">
+        <a:solidFill>
+          <a:schemeClr val="tx1"/>
+        </a:solidFill>
+        <a:latin typeface="+mn-lt"/>
+        <a:ea typeface="+mn-ea"/>
+        <a:cs typeface="+mn-cs"/>
+      </a:defRPr>
+    </a:lvl2pPr>
+    <a:lvl3pPr marL="914400" algn="l" defTabSz="914400" rtl="0" eaLnBrk="1" latinLnBrk="0" hangingPunct="1">
+      <a:defRPr sz="1200" kern="1200">
+        <a:solidFill>
+          <a:schemeClr val="tx1"/>
+        </a:solidFill>
+        <a:latin typeface="+mn-lt"/>
+        <a:ea typeface="+mn-ea"/>
+        <a:cs typeface="+mn-cs"/>
+      </a:defRPr>
+    </a:lvl3pPr>
+    <a:lvl4pPr marL="1371600" algn="l" defTabSz="914400" rtl="0" eaLnBrk="1" latinLnBrk="0" hangingPunct="1">
+      <a:defRPr sz="1200" kern="1200">
+        <a:solidFill>
+          <a:schemeClr val="tx1"/>
+        </a:solidFill>
+        <a:latin typeface="+mn-lt"/>
+        <a:ea typeface="+mn-ea"/>
+        <a:cs typeface="+mn-cs"/>
+      </a:defRPr>
+    </a:lvl4pPr>
+    <a:lvl5pPr marL="1828800" algn="l" defTabSz="914400" rtl="0" eaLnBrk="1" latinLnBrk="0" hangingPunct="1">
+      <a:defRPr sz="1200" kern="1200">
+        <a:solidFill>
+          <a:schemeClr val="tx1"/>
+        </a:solidFill>
+        <a:latin typeface="+mn-lt"/>
+        <a:ea typeface="+mn-ea"/>
+        <a:cs typeface="+mn-cs"/>
+      </a:defRPr>
+    </a:lvl5pPr>
+    <a:lvl6pPr marL="2286000" algn="l" defTabSz="914400" rtl="0" eaLnBrk="1" latinLnBrk="0" hangingPunct="1">
+      <a:defRPr sz="1200" kern="1200">
+        <a:solidFill>
+          <a:schemeClr val="tx1"/>
+        </a:solidFill>
+        <a:latin typeface="+mn-lt"/>
+        <a:ea typeface="+mn-ea"/>
+        <a:cs typeface="+mn-cs"/>
+      </a:defRPr>
+    </a:lvl6pPr>
+    <a:lvl7pPr marL="2743200" algn="l" defTabSz="914400" rtl="0" eaLnBrk="1" latinLnBrk="0" hangingPunct="1">
+      <a:defRPr sz="1200" kern="1200">
+        <a:solidFill>
+          <a:schemeClr val="tx1"/>
+        </a:solidFill>
+        <a:latin typeface="+mn-lt"/>
+        <a:ea typeface="+mn-ea"/>
+        <a:cs typeface="+mn-cs"/>
+      </a:defRPr>
+    </a:lvl7pPr>
+    <a:lvl8pPr marL="3200400" algn="l" defTabSz="914400" rtl="0" eaLnBrk="1" latinLnBrk="0" hangingPunct="1">
+      <a:defRPr sz="1200" kern="1200">
+        <a:solidFill>
+          <a:schemeClr val="tx1"/>
+        </a:solidFill>
+        <a:latin typeface="+mn-lt"/>
+        <a:ea typeface="+mn-ea"/>
+        <a:cs typeface="+mn-cs"/>
+      </a:defRPr>
+    </a:lvl8pPr>
+    <a:lvl9pPr marL="3657600" algn="l" defTabSz="914400" rtl="0" eaLnBrk="1" latinLnBrk="0" hangingPunct="1">
+      <a:defRPr sz="1200" kern="1200">
+        <a:solidFill>
+          <a:schemeClr val="tx1"/>
+        </a:solidFill>
+        <a:latin typeface="+mn-lt"/>
+        <a:ea typeface="+mn-ea"/>
+        <a:cs typeface="+mn-cs"/>
+      </a:defRPr>
+    </a:lvl9pPr>
+  </p:notesStyle>
+</p:notesMaster>
+</file>
+
+<file path=ppt/notesSlides/notesSlide1.xml><?xml version="1.0" encoding="utf-8"?>
+<p:notes xmlns:a="http://schemas.openxmlformats.org/drawingml/2006/main" xmlns:r="http://schemas.openxmlformats.org/officeDocument/2006/relationships" xmlns:p="http://schemas.openxmlformats.org/presentationml/2006/main">
+  <p:cSld>
+    <p:spTree>
+      <p:nvGrpSpPr>
+        <p:cNvPr id="1" name=""/>
+        <p:cNvGrpSpPr/>
+        <p:nvPr/>
+      </p:nvGrpSpPr>
+      <p:grpSpPr>
+        <a:xfrm>
+          <a:off x="0" y="0"/>
+          <a:ext cx="0" cy="0"/>
+          <a:chOff x="0" y="0"/>
+          <a:chExt cx="0" cy="0"/>
+        </a:xfrm>
+      </p:grpSpPr>
+      <p:sp>
+        <p:nvSpPr>
+          <p:cNvPr id="2" name="Folienbildplatzhalter 1"/>
+          <p:cNvSpPr>
+            <a:spLocks noGrp="1" noRot="1" noChangeAspect="1"/>
+          </p:cNvSpPr>
+          <p:nvPr>
+            <p:ph type="sldImg"/>
+          </p:nvPr>
+        </p:nvSpPr>
+        <p:spPr>
+          <a:xfrm>
+            <a:off x="2025650" y="1143000"/>
+            <a:ext cx="2806700" cy="3086100"/>
+          </a:xfrm>
+        </p:spPr>
+      </p:sp>
+      <p:sp>
+        <p:nvSpPr>
+          <p:cNvPr id="3" name="Notizenplatzhalter 2"/>
+          <p:cNvSpPr>
+            <a:spLocks noGrp="1"/>
+          </p:cNvSpPr>
+          <p:nvPr>
+            <p:ph type="body" idx="1"/>
+          </p:nvPr>
+        </p:nvSpPr>
+        <p:spPr/>
+        <p:txBody>
+          <a:bodyPr/>
+          <a:lstStyle/>
+          <a:p>
+            <a:endParaRPr lang="en-US" dirty="0"/>
+          </a:p>
+        </p:txBody>
+      </p:sp>
+      <p:sp>
+        <p:nvSpPr>
+          <p:cNvPr id="4" name="Foliennummernplatzhalter 3"/>
+          <p:cNvSpPr>
+            <a:spLocks noGrp="1"/>
+          </p:cNvSpPr>
+          <p:nvPr>
+            <p:ph type="sldNum" sz="quarter" idx="5"/>
+          </p:nvPr>
+        </p:nvSpPr>
+        <p:spPr/>
+        <p:txBody>
+          <a:bodyPr/>
+          <a:lstStyle/>
+          <a:p>
+            <a:fld id="{B03EF438-B9BE-7D40-9CFB-BAFF628B94D9}" type="slidenum">
+              <a:rPr lang="en-US" smtClean="0"/>
+              <a:t>1</a:t>
+            </a:fld>
+            <a:endParaRPr lang="en-US"/>
+          </a:p>
+        </p:txBody>
+      </p:sp>
+    </p:spTree>
+    <p:extLst>
+      <p:ext uri="{BB962C8B-B14F-4D97-AF65-F5344CB8AC3E}">
+        <p14:creationId xmlns:p14="http://schemas.microsoft.com/office/powerpoint/2010/main" val="1167722061"/>
+      </p:ext>
+    </p:extLst>
+  </p:cSld>
+  <p:clrMapOvr>
+    <a:masterClrMapping/>
+  </p:clrMapOvr>
+</p:notes>
+</file>
+
 <file path=ppt/slideLayouts/slideLayout1.xml><?xml version="1.0" encoding="utf-8"?>
 <p:sldLayout xmlns:a="http://schemas.openxmlformats.org/drawingml/2006/main" xmlns:r="http://schemas.openxmlformats.org/officeDocument/2006/relationships" xmlns:p="http://schemas.openxmlformats.org/presentationml/2006/main" type="title" preserve="1">
   <p:cSld name="Titelfolie">
@@ -141,15 +583,15 @@
         </p:nvSpPr>
         <p:spPr>
           <a:xfrm>
-            <a:off x="674966" y="1496484"/>
-            <a:ext cx="7649607" cy="3183467"/>
+            <a:off x="1008698" y="2419835"/>
+            <a:ext cx="11431905" cy="5147710"/>
           </a:xfrm>
         </p:spPr>
         <p:txBody>
           <a:bodyPr anchor="b"/>
           <a:lstStyle>
             <a:lvl1pPr algn="ctr">
-              <a:defRPr sz="5905"/>
+              <a:defRPr sz="8825"/>
             </a:lvl1pPr>
           </a:lstStyle>
           <a:p>
@@ -173,8 +615,8 @@
         </p:nvSpPr>
         <p:spPr>
           <a:xfrm>
-            <a:off x="1124942" y="4802717"/>
-            <a:ext cx="6749654" cy="2207683"/>
+            <a:off x="1681163" y="7766060"/>
+            <a:ext cx="10086975" cy="3569854"/>
           </a:xfrm>
         </p:spPr>
         <p:txBody>
@@ -182,39 +624,39 @@
           <a:lstStyle>
             <a:lvl1pPr marL="0" indent="0" algn="ctr">
               <a:buNone/>
-              <a:defRPr sz="2362"/>
+              <a:defRPr sz="3530"/>
             </a:lvl1pPr>
-            <a:lvl2pPr marL="449976" indent="0" algn="ctr">
-              <a:buNone/>
-              <a:defRPr sz="1968"/>
+            <a:lvl2pPr marL="672450" indent="0" algn="ctr">
+              <a:buNone/>
+              <a:defRPr sz="2942"/>
             </a:lvl2pPr>
-            <a:lvl3pPr marL="899952" indent="0" algn="ctr">
-              <a:buNone/>
-              <a:defRPr sz="1772"/>
+            <a:lvl3pPr marL="1344900" indent="0" algn="ctr">
+              <a:buNone/>
+              <a:defRPr sz="2647"/>
             </a:lvl3pPr>
-            <a:lvl4pPr marL="1349929" indent="0" algn="ctr">
-              <a:buNone/>
-              <a:defRPr sz="1575"/>
+            <a:lvl4pPr marL="2017349" indent="0" algn="ctr">
+              <a:buNone/>
+              <a:defRPr sz="2353"/>
             </a:lvl4pPr>
-            <a:lvl5pPr marL="1799905" indent="0" algn="ctr">
-              <a:buNone/>
-              <a:defRPr sz="1575"/>
+            <a:lvl5pPr marL="2689799" indent="0" algn="ctr">
+              <a:buNone/>
+              <a:defRPr sz="2353"/>
             </a:lvl5pPr>
-            <a:lvl6pPr marL="2249881" indent="0" algn="ctr">
-              <a:buNone/>
-              <a:defRPr sz="1575"/>
+            <a:lvl6pPr marL="3362249" indent="0" algn="ctr">
+              <a:buNone/>
+              <a:defRPr sz="2353"/>
             </a:lvl6pPr>
-            <a:lvl7pPr marL="2699857" indent="0" algn="ctr">
-              <a:buNone/>
-              <a:defRPr sz="1575"/>
+            <a:lvl7pPr marL="4034699" indent="0" algn="ctr">
+              <a:buNone/>
+              <a:defRPr sz="2353"/>
             </a:lvl7pPr>
-            <a:lvl8pPr marL="3149834" indent="0" algn="ctr">
-              <a:buNone/>
-              <a:defRPr sz="1575"/>
+            <a:lvl8pPr marL="4707148" indent="0" algn="ctr">
+              <a:buNone/>
+              <a:defRPr sz="2353"/>
             </a:lvl8pPr>
-            <a:lvl9pPr marL="3599810" indent="0" algn="ctr">
-              <a:buNone/>
-              <a:defRPr sz="1575"/>
+            <a:lvl9pPr marL="5379598" indent="0" algn="ctr">
+              <a:buNone/>
+              <a:defRPr sz="2353"/>
             </a:lvl9pPr>
           </a:lstStyle>
           <a:p>
@@ -243,7 +685,7 @@
           <a:p>
             <a:fld id="{BD39A238-DBC5-D247-B410-6C02E6BD80FF}" type="datetimeFigureOut">
               <a:rPr lang="en-US" smtClean="0"/>
-              <a:t>10/23/25</a:t>
+              <a:t>1/12/26</a:t>
             </a:fld>
             <a:endParaRPr lang="en-US"/>
           </a:p>
@@ -285,7 +727,7 @@
           <a:p>
             <a:fld id="{727024B5-A3DE-144E-AA20-5DAC5431DA34}" type="slidenum">
               <a:rPr lang="en-US" smtClean="0"/>
-              <a:t>‹#›</a:t>
+              <a:t>‹Nr.›</a:t>
             </a:fld>
             <a:endParaRPr lang="en-US"/>
           </a:p>
@@ -294,7 +736,7 @@
     </p:spTree>
     <p:extLst>
       <p:ext uri="{BB962C8B-B14F-4D97-AF65-F5344CB8AC3E}">
-        <p14:creationId xmlns:p14="http://schemas.microsoft.com/office/powerpoint/2010/main" val="2479686350"/>
+        <p14:creationId xmlns:p14="http://schemas.microsoft.com/office/powerpoint/2010/main" val="2284011936"/>
       </p:ext>
     </p:extLst>
   </p:cSld>
@@ -413,7 +855,7 @@
           <a:p>
             <a:fld id="{BD39A238-DBC5-D247-B410-6C02E6BD80FF}" type="datetimeFigureOut">
               <a:rPr lang="en-US" smtClean="0"/>
-              <a:t>10/23/25</a:t>
+              <a:t>1/12/26</a:t>
             </a:fld>
             <a:endParaRPr lang="en-US"/>
           </a:p>
@@ -455,7 +897,7 @@
           <a:p>
             <a:fld id="{727024B5-A3DE-144E-AA20-5DAC5431DA34}" type="slidenum">
               <a:rPr lang="en-US" smtClean="0"/>
-              <a:t>‹#›</a:t>
+              <a:t>‹Nr.›</a:t>
             </a:fld>
             <a:endParaRPr lang="en-US"/>
           </a:p>
@@ -464,7 +906,7 @@
     </p:spTree>
     <p:extLst>
       <p:ext uri="{BB962C8B-B14F-4D97-AF65-F5344CB8AC3E}">
-        <p14:creationId xmlns:p14="http://schemas.microsoft.com/office/powerpoint/2010/main" val="1192514214"/>
+        <p14:creationId xmlns:p14="http://schemas.microsoft.com/office/powerpoint/2010/main" val="2713511040"/>
       </p:ext>
     </p:extLst>
   </p:cSld>
@@ -503,8 +945,8 @@
         </p:nvSpPr>
         <p:spPr>
           <a:xfrm>
-            <a:off x="6440295" y="486833"/>
-            <a:ext cx="1940525" cy="7749117"/>
+            <a:off x="9624656" y="787216"/>
+            <a:ext cx="2900005" cy="12530430"/>
           </a:xfrm>
         </p:spPr>
         <p:txBody>
@@ -531,8 +973,8 @@
         </p:nvSpPr>
         <p:spPr>
           <a:xfrm>
-            <a:off x="618719" y="486833"/>
-            <a:ext cx="5709082" cy="7749117"/>
+            <a:off x="924640" y="787216"/>
+            <a:ext cx="8531900" cy="12530430"/>
           </a:xfrm>
         </p:spPr>
         <p:txBody>
@@ -593,7 +1035,7 @@
           <a:p>
             <a:fld id="{BD39A238-DBC5-D247-B410-6C02E6BD80FF}" type="datetimeFigureOut">
               <a:rPr lang="en-US" smtClean="0"/>
-              <a:t>10/23/25</a:t>
+              <a:t>1/12/26</a:t>
             </a:fld>
             <a:endParaRPr lang="en-US"/>
           </a:p>
@@ -635,7 +1077,7 @@
           <a:p>
             <a:fld id="{727024B5-A3DE-144E-AA20-5DAC5431DA34}" type="slidenum">
               <a:rPr lang="en-US" smtClean="0"/>
-              <a:t>‹#›</a:t>
+              <a:t>‹Nr.›</a:t>
             </a:fld>
             <a:endParaRPr lang="en-US"/>
           </a:p>
@@ -644,7 +1086,7 @@
     </p:spTree>
     <p:extLst>
       <p:ext uri="{BB962C8B-B14F-4D97-AF65-F5344CB8AC3E}">
-        <p14:creationId xmlns:p14="http://schemas.microsoft.com/office/powerpoint/2010/main" val="2222803960"/>
+        <p14:creationId xmlns:p14="http://schemas.microsoft.com/office/powerpoint/2010/main" val="3315912085"/>
       </p:ext>
     </p:extLst>
   </p:cSld>
@@ -763,7 +1205,7 @@
           <a:p>
             <a:fld id="{BD39A238-DBC5-D247-B410-6C02E6BD80FF}" type="datetimeFigureOut">
               <a:rPr lang="en-US" smtClean="0"/>
-              <a:t>10/23/25</a:t>
+              <a:t>1/12/26</a:t>
             </a:fld>
             <a:endParaRPr lang="en-US"/>
           </a:p>
@@ -805,7 +1247,7 @@
           <a:p>
             <a:fld id="{727024B5-A3DE-144E-AA20-5DAC5431DA34}" type="slidenum">
               <a:rPr lang="en-US" smtClean="0"/>
-              <a:t>‹#›</a:t>
+              <a:t>‹Nr.›</a:t>
             </a:fld>
             <a:endParaRPr lang="en-US"/>
           </a:p>
@@ -814,7 +1256,7 @@
     </p:spTree>
     <p:extLst>
       <p:ext uri="{BB962C8B-B14F-4D97-AF65-F5344CB8AC3E}">
-        <p14:creationId xmlns:p14="http://schemas.microsoft.com/office/powerpoint/2010/main" val="3007981741"/>
+        <p14:creationId xmlns:p14="http://schemas.microsoft.com/office/powerpoint/2010/main" val="4047286208"/>
       </p:ext>
     </p:extLst>
   </p:cSld>
@@ -853,15 +1295,15 @@
         </p:nvSpPr>
         <p:spPr>
           <a:xfrm>
-            <a:off x="614031" y="2279653"/>
-            <a:ext cx="7762102" cy="3803649"/>
+            <a:off x="917635" y="3686230"/>
+            <a:ext cx="11600021" cy="6150554"/>
           </a:xfrm>
         </p:spPr>
         <p:txBody>
           <a:bodyPr anchor="b"/>
           <a:lstStyle>
             <a:lvl1pPr>
-              <a:defRPr sz="5905"/>
+              <a:defRPr sz="8825"/>
             </a:lvl1pPr>
           </a:lstStyle>
           <a:p>
@@ -885,8 +1327,8 @@
         </p:nvSpPr>
         <p:spPr>
           <a:xfrm>
-            <a:off x="614031" y="6119286"/>
-            <a:ext cx="7762102" cy="2000249"/>
+            <a:off x="917635" y="9894970"/>
+            <a:ext cx="11600021" cy="3234431"/>
           </a:xfrm>
         </p:spPr>
         <p:txBody>
@@ -894,15 +1336,15 @@
           <a:lstStyle>
             <a:lvl1pPr marL="0" indent="0">
               <a:buNone/>
-              <a:defRPr sz="2362">
+              <a:defRPr sz="3530">
                 <a:solidFill>
                   <a:schemeClr val="tx1"/>
                 </a:solidFill>
               </a:defRPr>
             </a:lvl1pPr>
-            <a:lvl2pPr marL="449976" indent="0">
-              <a:buNone/>
-              <a:defRPr sz="1968">
+            <a:lvl2pPr marL="672450" indent="0">
+              <a:buNone/>
+              <a:defRPr sz="2942">
                 <a:solidFill>
                   <a:schemeClr val="tx1">
                     <a:tint val="75000"/>
@@ -910,9 +1352,9 @@
                 </a:solidFill>
               </a:defRPr>
             </a:lvl2pPr>
-            <a:lvl3pPr marL="899952" indent="0">
-              <a:buNone/>
-              <a:defRPr sz="1772">
+            <a:lvl3pPr marL="1344900" indent="0">
+              <a:buNone/>
+              <a:defRPr sz="2647">
                 <a:solidFill>
                   <a:schemeClr val="tx1">
                     <a:tint val="75000"/>
@@ -920,9 +1362,9 @@
                 </a:solidFill>
               </a:defRPr>
             </a:lvl3pPr>
-            <a:lvl4pPr marL="1349929" indent="0">
-              <a:buNone/>
-              <a:defRPr sz="1575">
+            <a:lvl4pPr marL="2017349" indent="0">
+              <a:buNone/>
+              <a:defRPr sz="2353">
                 <a:solidFill>
                   <a:schemeClr val="tx1">
                     <a:tint val="75000"/>
@@ -930,9 +1372,9 @@
                 </a:solidFill>
               </a:defRPr>
             </a:lvl4pPr>
-            <a:lvl5pPr marL="1799905" indent="0">
-              <a:buNone/>
-              <a:defRPr sz="1575">
+            <a:lvl5pPr marL="2689799" indent="0">
+              <a:buNone/>
+              <a:defRPr sz="2353">
                 <a:solidFill>
                   <a:schemeClr val="tx1">
                     <a:tint val="75000"/>
@@ -940,9 +1382,9 @@
                 </a:solidFill>
               </a:defRPr>
             </a:lvl5pPr>
-            <a:lvl6pPr marL="2249881" indent="0">
-              <a:buNone/>
-              <a:defRPr sz="1575">
+            <a:lvl6pPr marL="3362249" indent="0">
+              <a:buNone/>
+              <a:defRPr sz="2353">
                 <a:solidFill>
                   <a:schemeClr val="tx1">
                     <a:tint val="75000"/>
@@ -950,9 +1392,9 @@
                 </a:solidFill>
               </a:defRPr>
             </a:lvl6pPr>
-            <a:lvl7pPr marL="2699857" indent="0">
-              <a:buNone/>
-              <a:defRPr sz="1575">
+            <a:lvl7pPr marL="4034699" indent="0">
+              <a:buNone/>
+              <a:defRPr sz="2353">
                 <a:solidFill>
                   <a:schemeClr val="tx1">
                     <a:tint val="75000"/>
@@ -960,9 +1402,9 @@
                 </a:solidFill>
               </a:defRPr>
             </a:lvl7pPr>
-            <a:lvl8pPr marL="3149834" indent="0">
-              <a:buNone/>
-              <a:defRPr sz="1575">
+            <a:lvl8pPr marL="4707148" indent="0">
+              <a:buNone/>
+              <a:defRPr sz="2353">
                 <a:solidFill>
                   <a:schemeClr val="tx1">
                     <a:tint val="75000"/>
@@ -970,9 +1412,9 @@
                 </a:solidFill>
               </a:defRPr>
             </a:lvl8pPr>
-            <a:lvl9pPr marL="3599810" indent="0">
-              <a:buNone/>
-              <a:defRPr sz="1575">
+            <a:lvl9pPr marL="5379598" indent="0">
+              <a:buNone/>
+              <a:defRPr sz="2353">
                 <a:solidFill>
                   <a:schemeClr val="tx1">
                     <a:tint val="75000"/>
@@ -1007,7 +1449,7 @@
           <a:p>
             <a:fld id="{BD39A238-DBC5-D247-B410-6C02E6BD80FF}" type="datetimeFigureOut">
               <a:rPr lang="en-US" smtClean="0"/>
-              <a:t>10/23/25</a:t>
+              <a:t>1/12/26</a:t>
             </a:fld>
             <a:endParaRPr lang="en-US"/>
           </a:p>
@@ -1049,7 +1491,7 @@
           <a:p>
             <a:fld id="{727024B5-A3DE-144E-AA20-5DAC5431DA34}" type="slidenum">
               <a:rPr lang="en-US" smtClean="0"/>
-              <a:t>‹#›</a:t>
+              <a:t>‹Nr.›</a:t>
             </a:fld>
             <a:endParaRPr lang="en-US"/>
           </a:p>
@@ -1058,7 +1500,7 @@
     </p:spTree>
     <p:extLst>
       <p:ext uri="{BB962C8B-B14F-4D97-AF65-F5344CB8AC3E}">
-        <p14:creationId xmlns:p14="http://schemas.microsoft.com/office/powerpoint/2010/main" val="463240157"/>
+        <p14:creationId xmlns:p14="http://schemas.microsoft.com/office/powerpoint/2010/main" val="651116993"/>
       </p:ext>
     </p:extLst>
   </p:cSld>
@@ -1120,8 +1562,8 @@
         </p:nvSpPr>
         <p:spPr>
           <a:xfrm>
-            <a:off x="618718" y="2434167"/>
-            <a:ext cx="3824804" cy="5801784"/>
+            <a:off x="924639" y="3936081"/>
+            <a:ext cx="5715953" cy="9381565"/>
           </a:xfrm>
         </p:spPr>
         <p:txBody>
@@ -1177,8 +1619,8 @@
         </p:nvSpPr>
         <p:spPr>
           <a:xfrm>
-            <a:off x="4556016" y="2434167"/>
-            <a:ext cx="3824804" cy="5801784"/>
+            <a:off x="6808708" y="3936081"/>
+            <a:ext cx="5715953" cy="9381565"/>
           </a:xfrm>
         </p:spPr>
         <p:txBody>
@@ -1239,7 +1681,7 @@
           <a:p>
             <a:fld id="{BD39A238-DBC5-D247-B410-6C02E6BD80FF}" type="datetimeFigureOut">
               <a:rPr lang="en-US" smtClean="0"/>
-              <a:t>10/23/25</a:t>
+              <a:t>1/12/26</a:t>
             </a:fld>
             <a:endParaRPr lang="en-US"/>
           </a:p>
@@ -1281,7 +1723,7 @@
           <a:p>
             <a:fld id="{727024B5-A3DE-144E-AA20-5DAC5431DA34}" type="slidenum">
               <a:rPr lang="en-US" smtClean="0"/>
-              <a:t>‹#›</a:t>
+              <a:t>‹Nr.›</a:t>
             </a:fld>
             <a:endParaRPr lang="en-US"/>
           </a:p>
@@ -1290,7 +1732,7 @@
     </p:spTree>
     <p:extLst>
       <p:ext uri="{BB962C8B-B14F-4D97-AF65-F5344CB8AC3E}">
-        <p14:creationId xmlns:p14="http://schemas.microsoft.com/office/powerpoint/2010/main" val="1306012733"/>
+        <p14:creationId xmlns:p14="http://schemas.microsoft.com/office/powerpoint/2010/main" val="618720276"/>
       </p:ext>
     </p:extLst>
   </p:cSld>
@@ -1329,8 +1771,8 @@
         </p:nvSpPr>
         <p:spPr>
           <a:xfrm>
-            <a:off x="619890" y="486835"/>
-            <a:ext cx="7762102" cy="1767417"/>
+            <a:off x="926391" y="787220"/>
+            <a:ext cx="11600021" cy="2857938"/>
           </a:xfrm>
         </p:spPr>
         <p:txBody>
@@ -1357,8 +1799,8 @@
         </p:nvSpPr>
         <p:spPr>
           <a:xfrm>
-            <a:off x="619891" y="2241551"/>
-            <a:ext cx="3807226" cy="1098549"/>
+            <a:off x="926393" y="3624618"/>
+            <a:ext cx="5689683" cy="1776370"/>
           </a:xfrm>
         </p:spPr>
         <p:txBody>
@@ -1366,39 +1808,39 @@
           <a:lstStyle>
             <a:lvl1pPr marL="0" indent="0">
               <a:buNone/>
-              <a:defRPr sz="2362" b="1"/>
+              <a:defRPr sz="3530" b="1"/>
             </a:lvl1pPr>
-            <a:lvl2pPr marL="449976" indent="0">
-              <a:buNone/>
-              <a:defRPr sz="1968" b="1"/>
+            <a:lvl2pPr marL="672450" indent="0">
+              <a:buNone/>
+              <a:defRPr sz="2942" b="1"/>
             </a:lvl2pPr>
-            <a:lvl3pPr marL="899952" indent="0">
-              <a:buNone/>
-              <a:defRPr sz="1772" b="1"/>
+            <a:lvl3pPr marL="1344900" indent="0">
+              <a:buNone/>
+              <a:defRPr sz="2647" b="1"/>
             </a:lvl3pPr>
-            <a:lvl4pPr marL="1349929" indent="0">
-              <a:buNone/>
-              <a:defRPr sz="1575" b="1"/>
+            <a:lvl4pPr marL="2017349" indent="0">
+              <a:buNone/>
+              <a:defRPr sz="2353" b="1"/>
             </a:lvl4pPr>
-            <a:lvl5pPr marL="1799905" indent="0">
-              <a:buNone/>
-              <a:defRPr sz="1575" b="1"/>
+            <a:lvl5pPr marL="2689799" indent="0">
+              <a:buNone/>
+              <a:defRPr sz="2353" b="1"/>
             </a:lvl5pPr>
-            <a:lvl6pPr marL="2249881" indent="0">
-              <a:buNone/>
-              <a:defRPr sz="1575" b="1"/>
+            <a:lvl6pPr marL="3362249" indent="0">
+              <a:buNone/>
+              <a:defRPr sz="2353" b="1"/>
             </a:lvl6pPr>
-            <a:lvl7pPr marL="2699857" indent="0">
-              <a:buNone/>
-              <a:defRPr sz="1575" b="1"/>
+            <a:lvl7pPr marL="4034699" indent="0">
+              <a:buNone/>
+              <a:defRPr sz="2353" b="1"/>
             </a:lvl7pPr>
-            <a:lvl8pPr marL="3149834" indent="0">
-              <a:buNone/>
-              <a:defRPr sz="1575" b="1"/>
+            <a:lvl8pPr marL="4707148" indent="0">
+              <a:buNone/>
+              <a:defRPr sz="2353" b="1"/>
             </a:lvl8pPr>
-            <a:lvl9pPr marL="3599810" indent="0">
-              <a:buNone/>
-              <a:defRPr sz="1575" b="1"/>
+            <a:lvl9pPr marL="5379598" indent="0">
+              <a:buNone/>
+              <a:defRPr sz="2353" b="1"/>
             </a:lvl9pPr>
           </a:lstStyle>
           <a:p>
@@ -1422,8 +1864,8 @@
         </p:nvSpPr>
         <p:spPr>
           <a:xfrm>
-            <a:off x="619891" y="3340100"/>
-            <a:ext cx="3807226" cy="4912784"/>
+            <a:off x="926393" y="5400988"/>
+            <a:ext cx="5689683" cy="7944040"/>
           </a:xfrm>
         </p:spPr>
         <p:txBody>
@@ -1479,8 +1921,8 @@
         </p:nvSpPr>
         <p:spPr>
           <a:xfrm>
-            <a:off x="4556017" y="2241551"/>
-            <a:ext cx="3825976" cy="1098549"/>
+            <a:off x="6808709" y="3624618"/>
+            <a:ext cx="5717704" cy="1776370"/>
           </a:xfrm>
         </p:spPr>
         <p:txBody>
@@ -1488,39 +1930,39 @@
           <a:lstStyle>
             <a:lvl1pPr marL="0" indent="0">
               <a:buNone/>
-              <a:defRPr sz="2362" b="1"/>
+              <a:defRPr sz="3530" b="1"/>
             </a:lvl1pPr>
-            <a:lvl2pPr marL="449976" indent="0">
-              <a:buNone/>
-              <a:defRPr sz="1968" b="1"/>
+            <a:lvl2pPr marL="672450" indent="0">
+              <a:buNone/>
+              <a:defRPr sz="2942" b="1"/>
             </a:lvl2pPr>
-            <a:lvl3pPr marL="899952" indent="0">
-              <a:buNone/>
-              <a:defRPr sz="1772" b="1"/>
+            <a:lvl3pPr marL="1344900" indent="0">
+              <a:buNone/>
+              <a:defRPr sz="2647" b="1"/>
             </a:lvl3pPr>
-            <a:lvl4pPr marL="1349929" indent="0">
-              <a:buNone/>
-              <a:defRPr sz="1575" b="1"/>
+            <a:lvl4pPr marL="2017349" indent="0">
+              <a:buNone/>
+              <a:defRPr sz="2353" b="1"/>
             </a:lvl4pPr>
-            <a:lvl5pPr marL="1799905" indent="0">
-              <a:buNone/>
-              <a:defRPr sz="1575" b="1"/>
+            <a:lvl5pPr marL="2689799" indent="0">
+              <a:buNone/>
+              <a:defRPr sz="2353" b="1"/>
             </a:lvl5pPr>
-            <a:lvl6pPr marL="2249881" indent="0">
-              <a:buNone/>
-              <a:defRPr sz="1575" b="1"/>
+            <a:lvl6pPr marL="3362249" indent="0">
+              <a:buNone/>
+              <a:defRPr sz="2353" b="1"/>
             </a:lvl6pPr>
-            <a:lvl7pPr marL="2699857" indent="0">
-              <a:buNone/>
-              <a:defRPr sz="1575" b="1"/>
+            <a:lvl7pPr marL="4034699" indent="0">
+              <a:buNone/>
+              <a:defRPr sz="2353" b="1"/>
             </a:lvl7pPr>
-            <a:lvl8pPr marL="3149834" indent="0">
-              <a:buNone/>
-              <a:defRPr sz="1575" b="1"/>
+            <a:lvl8pPr marL="4707148" indent="0">
+              <a:buNone/>
+              <a:defRPr sz="2353" b="1"/>
             </a:lvl8pPr>
-            <a:lvl9pPr marL="3599810" indent="0">
-              <a:buNone/>
-              <a:defRPr sz="1575" b="1"/>
+            <a:lvl9pPr marL="5379598" indent="0">
+              <a:buNone/>
+              <a:defRPr sz="2353" b="1"/>
             </a:lvl9pPr>
           </a:lstStyle>
           <a:p>
@@ -1544,8 +1986,8 @@
         </p:nvSpPr>
         <p:spPr>
           <a:xfrm>
-            <a:off x="4556017" y="3340100"/>
-            <a:ext cx="3825976" cy="4912784"/>
+            <a:off x="6808709" y="5400988"/>
+            <a:ext cx="5717704" cy="7944040"/>
           </a:xfrm>
         </p:spPr>
         <p:txBody>
@@ -1606,7 +2048,7 @@
           <a:p>
             <a:fld id="{BD39A238-DBC5-D247-B410-6C02E6BD80FF}" type="datetimeFigureOut">
               <a:rPr lang="en-US" smtClean="0"/>
-              <a:t>10/23/25</a:t>
+              <a:t>1/12/26</a:t>
             </a:fld>
             <a:endParaRPr lang="en-US"/>
           </a:p>
@@ -1648,7 +2090,7 @@
           <a:p>
             <a:fld id="{727024B5-A3DE-144E-AA20-5DAC5431DA34}" type="slidenum">
               <a:rPr lang="en-US" smtClean="0"/>
-              <a:t>‹#›</a:t>
+              <a:t>‹Nr.›</a:t>
             </a:fld>
             <a:endParaRPr lang="en-US"/>
           </a:p>
@@ -1657,7 +2099,7 @@
     </p:spTree>
     <p:extLst>
       <p:ext uri="{BB962C8B-B14F-4D97-AF65-F5344CB8AC3E}">
-        <p14:creationId xmlns:p14="http://schemas.microsoft.com/office/powerpoint/2010/main" val="1880787929"/>
+        <p14:creationId xmlns:p14="http://schemas.microsoft.com/office/powerpoint/2010/main" val="835269530"/>
       </p:ext>
     </p:extLst>
   </p:cSld>
@@ -1724,7 +2166,7 @@
           <a:p>
             <a:fld id="{BD39A238-DBC5-D247-B410-6C02E6BD80FF}" type="datetimeFigureOut">
               <a:rPr lang="en-US" smtClean="0"/>
-              <a:t>10/23/25</a:t>
+              <a:t>1/12/26</a:t>
             </a:fld>
             <a:endParaRPr lang="en-US"/>
           </a:p>
@@ -1766,7 +2208,7 @@
           <a:p>
             <a:fld id="{727024B5-A3DE-144E-AA20-5DAC5431DA34}" type="slidenum">
               <a:rPr lang="en-US" smtClean="0"/>
-              <a:t>‹#›</a:t>
+              <a:t>‹Nr.›</a:t>
             </a:fld>
             <a:endParaRPr lang="en-US"/>
           </a:p>
@@ -1775,7 +2217,7 @@
     </p:spTree>
     <p:extLst>
       <p:ext uri="{BB962C8B-B14F-4D97-AF65-F5344CB8AC3E}">
-        <p14:creationId xmlns:p14="http://schemas.microsoft.com/office/powerpoint/2010/main" val="4196162939"/>
+        <p14:creationId xmlns:p14="http://schemas.microsoft.com/office/powerpoint/2010/main" val="2781745827"/>
       </p:ext>
     </p:extLst>
   </p:cSld>
@@ -1819,7 +2261,7 @@
           <a:p>
             <a:fld id="{BD39A238-DBC5-D247-B410-6C02E6BD80FF}" type="datetimeFigureOut">
               <a:rPr lang="en-US" smtClean="0"/>
-              <a:t>10/23/25</a:t>
+              <a:t>1/12/26</a:t>
             </a:fld>
             <a:endParaRPr lang="en-US"/>
           </a:p>
@@ -1861,7 +2303,7 @@
           <a:p>
             <a:fld id="{727024B5-A3DE-144E-AA20-5DAC5431DA34}" type="slidenum">
               <a:rPr lang="en-US" smtClean="0"/>
-              <a:t>‹#›</a:t>
+              <a:t>‹Nr.›</a:t>
             </a:fld>
             <a:endParaRPr lang="en-US"/>
           </a:p>
@@ -1870,7 +2312,7 @@
     </p:spTree>
     <p:extLst>
       <p:ext uri="{BB962C8B-B14F-4D97-AF65-F5344CB8AC3E}">
-        <p14:creationId xmlns:p14="http://schemas.microsoft.com/office/powerpoint/2010/main" val="465059306"/>
+        <p14:creationId xmlns:p14="http://schemas.microsoft.com/office/powerpoint/2010/main" val="364342931"/>
       </p:ext>
     </p:extLst>
   </p:cSld>
@@ -1909,15 +2351,15 @@
         </p:nvSpPr>
         <p:spPr>
           <a:xfrm>
-            <a:off x="619891" y="609600"/>
-            <a:ext cx="2902585" cy="2133600"/>
+            <a:off x="926391" y="985732"/>
+            <a:ext cx="4337749" cy="3450061"/>
           </a:xfrm>
         </p:spPr>
         <p:txBody>
           <a:bodyPr anchor="b"/>
           <a:lstStyle>
             <a:lvl1pPr>
-              <a:defRPr sz="3149"/>
+              <a:defRPr sz="4707"/>
             </a:lvl1pPr>
           </a:lstStyle>
           <a:p>
@@ -1941,39 +2383,39 @@
         </p:nvSpPr>
         <p:spPr>
           <a:xfrm>
-            <a:off x="3825976" y="1316568"/>
-            <a:ext cx="4556016" cy="6498167"/>
+            <a:off x="5717704" y="2128910"/>
+            <a:ext cx="6808708" cy="10507626"/>
           </a:xfrm>
         </p:spPr>
         <p:txBody>
           <a:bodyPr/>
           <a:lstStyle>
             <a:lvl1pPr>
-              <a:defRPr sz="3149"/>
+              <a:defRPr sz="4707"/>
             </a:lvl1pPr>
             <a:lvl2pPr>
-              <a:defRPr sz="2756"/>
+              <a:defRPr sz="4118"/>
             </a:lvl2pPr>
             <a:lvl3pPr>
-              <a:defRPr sz="2362"/>
+              <a:defRPr sz="3530"/>
             </a:lvl3pPr>
             <a:lvl4pPr>
-              <a:defRPr sz="1968"/>
+              <a:defRPr sz="2942"/>
             </a:lvl4pPr>
             <a:lvl5pPr>
-              <a:defRPr sz="1968"/>
+              <a:defRPr sz="2942"/>
             </a:lvl5pPr>
             <a:lvl6pPr>
-              <a:defRPr sz="1968"/>
+              <a:defRPr sz="2942"/>
             </a:lvl6pPr>
             <a:lvl7pPr>
-              <a:defRPr sz="1968"/>
+              <a:defRPr sz="2942"/>
             </a:lvl7pPr>
             <a:lvl8pPr>
-              <a:defRPr sz="1968"/>
+              <a:defRPr sz="2942"/>
             </a:lvl8pPr>
             <a:lvl9pPr>
-              <a:defRPr sz="1968"/>
+              <a:defRPr sz="2942"/>
             </a:lvl9pPr>
           </a:lstStyle>
           <a:p>
@@ -2026,8 +2468,8 @@
         </p:nvSpPr>
         <p:spPr>
           <a:xfrm>
-            <a:off x="619891" y="2743200"/>
-            <a:ext cx="2902585" cy="5082117"/>
+            <a:off x="926391" y="4435793"/>
+            <a:ext cx="4337749" cy="8217854"/>
           </a:xfrm>
         </p:spPr>
         <p:txBody>
@@ -2035,39 +2477,39 @@
           <a:lstStyle>
             <a:lvl1pPr marL="0" indent="0">
               <a:buNone/>
-              <a:defRPr sz="1575"/>
+              <a:defRPr sz="2353"/>
             </a:lvl1pPr>
-            <a:lvl2pPr marL="449976" indent="0">
-              <a:buNone/>
-              <a:defRPr sz="1378"/>
+            <a:lvl2pPr marL="672450" indent="0">
+              <a:buNone/>
+              <a:defRPr sz="2059"/>
             </a:lvl2pPr>
-            <a:lvl3pPr marL="899952" indent="0">
-              <a:buNone/>
-              <a:defRPr sz="1181"/>
+            <a:lvl3pPr marL="1344900" indent="0">
+              <a:buNone/>
+              <a:defRPr sz="1765"/>
             </a:lvl3pPr>
-            <a:lvl4pPr marL="1349929" indent="0">
-              <a:buNone/>
-              <a:defRPr sz="984"/>
+            <a:lvl4pPr marL="2017349" indent="0">
+              <a:buNone/>
+              <a:defRPr sz="1471"/>
             </a:lvl4pPr>
-            <a:lvl5pPr marL="1799905" indent="0">
-              <a:buNone/>
-              <a:defRPr sz="984"/>
+            <a:lvl5pPr marL="2689799" indent="0">
+              <a:buNone/>
+              <a:defRPr sz="1471"/>
             </a:lvl5pPr>
-            <a:lvl6pPr marL="2249881" indent="0">
-              <a:buNone/>
-              <a:defRPr sz="984"/>
+            <a:lvl6pPr marL="3362249" indent="0">
+              <a:buNone/>
+              <a:defRPr sz="1471"/>
             </a:lvl6pPr>
-            <a:lvl7pPr marL="2699857" indent="0">
-              <a:buNone/>
-              <a:defRPr sz="984"/>
+            <a:lvl7pPr marL="4034699" indent="0">
+              <a:buNone/>
+              <a:defRPr sz="1471"/>
             </a:lvl7pPr>
-            <a:lvl8pPr marL="3149834" indent="0">
-              <a:buNone/>
-              <a:defRPr sz="984"/>
+            <a:lvl8pPr marL="4707148" indent="0">
+              <a:buNone/>
+              <a:defRPr sz="1471"/>
             </a:lvl8pPr>
-            <a:lvl9pPr marL="3599810" indent="0">
-              <a:buNone/>
-              <a:defRPr sz="984"/>
+            <a:lvl9pPr marL="5379598" indent="0">
+              <a:buNone/>
+              <a:defRPr sz="1471"/>
             </a:lvl9pPr>
           </a:lstStyle>
           <a:p>
@@ -2096,7 +2538,7 @@
           <a:p>
             <a:fld id="{BD39A238-DBC5-D247-B410-6C02E6BD80FF}" type="datetimeFigureOut">
               <a:rPr lang="en-US" smtClean="0"/>
-              <a:t>10/23/25</a:t>
+              <a:t>1/12/26</a:t>
             </a:fld>
             <a:endParaRPr lang="en-US"/>
           </a:p>
@@ -2138,7 +2580,7 @@
           <a:p>
             <a:fld id="{727024B5-A3DE-144E-AA20-5DAC5431DA34}" type="slidenum">
               <a:rPr lang="en-US" smtClean="0"/>
-              <a:t>‹#›</a:t>
+              <a:t>‹Nr.›</a:t>
             </a:fld>
             <a:endParaRPr lang="en-US"/>
           </a:p>
@@ -2147,7 +2589,7 @@
     </p:spTree>
     <p:extLst>
       <p:ext uri="{BB962C8B-B14F-4D97-AF65-F5344CB8AC3E}">
-        <p14:creationId xmlns:p14="http://schemas.microsoft.com/office/powerpoint/2010/main" val="2747672121"/>
+        <p14:creationId xmlns:p14="http://schemas.microsoft.com/office/powerpoint/2010/main" val="1051384556"/>
       </p:ext>
     </p:extLst>
   </p:cSld>
@@ -2186,15 +2628,15 @@
         </p:nvSpPr>
         <p:spPr>
           <a:xfrm>
-            <a:off x="619891" y="609600"/>
-            <a:ext cx="2902585" cy="2133600"/>
+            <a:off x="926391" y="985732"/>
+            <a:ext cx="4337749" cy="3450061"/>
           </a:xfrm>
         </p:spPr>
         <p:txBody>
           <a:bodyPr anchor="b"/>
           <a:lstStyle>
             <a:lvl1pPr>
-              <a:defRPr sz="3149"/>
+              <a:defRPr sz="4707"/>
             </a:lvl1pPr>
           </a:lstStyle>
           <a:p>
@@ -2218,8 +2660,8 @@
         </p:nvSpPr>
         <p:spPr>
           <a:xfrm>
-            <a:off x="3825976" y="1316568"/>
-            <a:ext cx="4556016" cy="6498167"/>
+            <a:off x="5717704" y="2128910"/>
+            <a:ext cx="6808708" cy="10507626"/>
           </a:xfrm>
         </p:spPr>
         <p:txBody>
@@ -2227,39 +2669,39 @@
           <a:lstStyle>
             <a:lvl1pPr marL="0" indent="0">
               <a:buNone/>
-              <a:defRPr sz="3149"/>
+              <a:defRPr sz="4707"/>
             </a:lvl1pPr>
-            <a:lvl2pPr marL="449976" indent="0">
-              <a:buNone/>
-              <a:defRPr sz="2756"/>
+            <a:lvl2pPr marL="672450" indent="0">
+              <a:buNone/>
+              <a:defRPr sz="4118"/>
             </a:lvl2pPr>
-            <a:lvl3pPr marL="899952" indent="0">
-              <a:buNone/>
-              <a:defRPr sz="2362"/>
+            <a:lvl3pPr marL="1344900" indent="0">
+              <a:buNone/>
+              <a:defRPr sz="3530"/>
             </a:lvl3pPr>
-            <a:lvl4pPr marL="1349929" indent="0">
-              <a:buNone/>
-              <a:defRPr sz="1968"/>
+            <a:lvl4pPr marL="2017349" indent="0">
+              <a:buNone/>
+              <a:defRPr sz="2942"/>
             </a:lvl4pPr>
-            <a:lvl5pPr marL="1799905" indent="0">
-              <a:buNone/>
-              <a:defRPr sz="1968"/>
+            <a:lvl5pPr marL="2689799" indent="0">
+              <a:buNone/>
+              <a:defRPr sz="2942"/>
             </a:lvl5pPr>
-            <a:lvl6pPr marL="2249881" indent="0">
-              <a:buNone/>
-              <a:defRPr sz="1968"/>
+            <a:lvl6pPr marL="3362249" indent="0">
+              <a:buNone/>
+              <a:defRPr sz="2942"/>
             </a:lvl6pPr>
-            <a:lvl7pPr marL="2699857" indent="0">
-              <a:buNone/>
-              <a:defRPr sz="1968"/>
+            <a:lvl7pPr marL="4034699" indent="0">
+              <a:buNone/>
+              <a:defRPr sz="2942"/>
             </a:lvl7pPr>
-            <a:lvl8pPr marL="3149834" indent="0">
-              <a:buNone/>
-              <a:defRPr sz="1968"/>
+            <a:lvl8pPr marL="4707148" indent="0">
+              <a:buNone/>
+              <a:defRPr sz="2942"/>
             </a:lvl8pPr>
-            <a:lvl9pPr marL="3599810" indent="0">
-              <a:buNone/>
-              <a:defRPr sz="1968"/>
+            <a:lvl9pPr marL="5379598" indent="0">
+              <a:buNone/>
+              <a:defRPr sz="2942"/>
             </a:lvl9pPr>
           </a:lstStyle>
           <a:p>
@@ -2283,8 +2725,8 @@
         </p:nvSpPr>
         <p:spPr>
           <a:xfrm>
-            <a:off x="619891" y="2743200"/>
-            <a:ext cx="2902585" cy="5082117"/>
+            <a:off x="926391" y="4435793"/>
+            <a:ext cx="4337749" cy="8217854"/>
           </a:xfrm>
         </p:spPr>
         <p:txBody>
@@ -2292,39 +2734,39 @@
           <a:lstStyle>
             <a:lvl1pPr marL="0" indent="0">
               <a:buNone/>
-              <a:defRPr sz="1575"/>
+              <a:defRPr sz="2353"/>
             </a:lvl1pPr>
-            <a:lvl2pPr marL="449976" indent="0">
-              <a:buNone/>
-              <a:defRPr sz="1378"/>
+            <a:lvl2pPr marL="672450" indent="0">
+              <a:buNone/>
+              <a:defRPr sz="2059"/>
             </a:lvl2pPr>
-            <a:lvl3pPr marL="899952" indent="0">
-              <a:buNone/>
-              <a:defRPr sz="1181"/>
+            <a:lvl3pPr marL="1344900" indent="0">
+              <a:buNone/>
+              <a:defRPr sz="1765"/>
             </a:lvl3pPr>
-            <a:lvl4pPr marL="1349929" indent="0">
-              <a:buNone/>
-              <a:defRPr sz="984"/>
+            <a:lvl4pPr marL="2017349" indent="0">
+              <a:buNone/>
+              <a:defRPr sz="1471"/>
             </a:lvl4pPr>
-            <a:lvl5pPr marL="1799905" indent="0">
-              <a:buNone/>
-              <a:defRPr sz="984"/>
+            <a:lvl5pPr marL="2689799" indent="0">
+              <a:buNone/>
+              <a:defRPr sz="1471"/>
             </a:lvl5pPr>
-            <a:lvl6pPr marL="2249881" indent="0">
-              <a:buNone/>
-              <a:defRPr sz="984"/>
+            <a:lvl6pPr marL="3362249" indent="0">
+              <a:buNone/>
+              <a:defRPr sz="1471"/>
             </a:lvl6pPr>
-            <a:lvl7pPr marL="2699857" indent="0">
-              <a:buNone/>
-              <a:defRPr sz="984"/>
+            <a:lvl7pPr marL="4034699" indent="0">
+              <a:buNone/>
+              <a:defRPr sz="1471"/>
             </a:lvl7pPr>
-            <a:lvl8pPr marL="3149834" indent="0">
-              <a:buNone/>
-              <a:defRPr sz="984"/>
+            <a:lvl8pPr marL="4707148" indent="0">
+              <a:buNone/>
+              <a:defRPr sz="1471"/>
             </a:lvl8pPr>
-            <a:lvl9pPr marL="3599810" indent="0">
-              <a:buNone/>
-              <a:defRPr sz="984"/>
+            <a:lvl9pPr marL="5379598" indent="0">
+              <a:buNone/>
+              <a:defRPr sz="1471"/>
             </a:lvl9pPr>
           </a:lstStyle>
           <a:p>
@@ -2353,7 +2795,7 @@
           <a:p>
             <a:fld id="{BD39A238-DBC5-D247-B410-6C02E6BD80FF}" type="datetimeFigureOut">
               <a:rPr lang="en-US" smtClean="0"/>
-              <a:t>10/23/25</a:t>
+              <a:t>1/12/26</a:t>
             </a:fld>
             <a:endParaRPr lang="en-US"/>
           </a:p>
@@ -2395,7 +2837,7 @@
           <a:p>
             <a:fld id="{727024B5-A3DE-144E-AA20-5DAC5431DA34}" type="slidenum">
               <a:rPr lang="en-US" smtClean="0"/>
-              <a:t>‹#›</a:t>
+              <a:t>‹Nr.›</a:t>
             </a:fld>
             <a:endParaRPr lang="en-US"/>
           </a:p>
@@ -2404,7 +2846,7 @@
     </p:spTree>
     <p:extLst>
       <p:ext uri="{BB962C8B-B14F-4D97-AF65-F5344CB8AC3E}">
-        <p14:creationId xmlns:p14="http://schemas.microsoft.com/office/powerpoint/2010/main" val="1687964473"/>
+        <p14:creationId xmlns:p14="http://schemas.microsoft.com/office/powerpoint/2010/main" val="3931952476"/>
       </p:ext>
     </p:extLst>
   </p:cSld>
@@ -2448,8 +2890,8 @@
         </p:nvSpPr>
         <p:spPr>
           <a:xfrm>
-            <a:off x="618718" y="486835"/>
-            <a:ext cx="7762102" cy="1767417"/>
+            <a:off x="924640" y="787220"/>
+            <a:ext cx="11600021" cy="2857938"/>
           </a:xfrm>
           <a:prstGeom prst="rect">
             <a:avLst/>
@@ -2481,8 +2923,8 @@
         </p:nvSpPr>
         <p:spPr>
           <a:xfrm>
-            <a:off x="618718" y="2434167"/>
-            <a:ext cx="7762102" cy="5801784"/>
+            <a:off x="924640" y="3936081"/>
+            <a:ext cx="11600021" cy="9381565"/>
           </a:xfrm>
           <a:prstGeom prst="rect">
             <a:avLst/>
@@ -2543,8 +2985,8 @@
         </p:nvSpPr>
         <p:spPr>
           <a:xfrm>
-            <a:off x="618718" y="8475136"/>
-            <a:ext cx="2024896" cy="486833"/>
+            <a:off x="924639" y="13704412"/>
+            <a:ext cx="3026093" cy="787216"/>
           </a:xfrm>
           <a:prstGeom prst="rect">
             <a:avLst/>
@@ -2554,7 +2996,7 @@
           <a:bodyPr vert="horz" lIns="91440" tIns="45720" rIns="91440" bIns="45720" rtlCol="0" anchor="ctr"/>
           <a:lstStyle>
             <a:lvl1pPr algn="l">
-              <a:defRPr sz="1181">
+              <a:defRPr sz="1765">
                 <a:solidFill>
                   <a:schemeClr val="tx1">
                     <a:tint val="75000"/>
@@ -2566,7 +3008,7 @@
           <a:p>
             <a:fld id="{BD39A238-DBC5-D247-B410-6C02E6BD80FF}" type="datetimeFigureOut">
               <a:rPr lang="en-US" smtClean="0"/>
-              <a:t>10/23/25</a:t>
+              <a:t>1/12/26</a:t>
             </a:fld>
             <a:endParaRPr lang="en-US"/>
           </a:p>
@@ -2584,8 +3026,8 @@
         </p:nvSpPr>
         <p:spPr>
           <a:xfrm>
-            <a:off x="2981097" y="8475136"/>
-            <a:ext cx="3037344" cy="486833"/>
+            <a:off x="4455081" y="13704412"/>
+            <a:ext cx="4539139" cy="787216"/>
           </a:xfrm>
           <a:prstGeom prst="rect">
             <a:avLst/>
@@ -2595,7 +3037,7 @@
           <a:bodyPr vert="horz" lIns="91440" tIns="45720" rIns="91440" bIns="45720" rtlCol="0" anchor="ctr"/>
           <a:lstStyle>
             <a:lvl1pPr algn="ctr">
-              <a:defRPr sz="1181">
+              <a:defRPr sz="1765">
                 <a:solidFill>
                   <a:schemeClr val="tx1">
                     <a:tint val="75000"/>
@@ -2621,8 +3063,8 @@
         </p:nvSpPr>
         <p:spPr>
           <a:xfrm>
-            <a:off x="6355924" y="8475136"/>
-            <a:ext cx="2024896" cy="486833"/>
+            <a:off x="9498568" y="13704412"/>
+            <a:ext cx="3026093" cy="787216"/>
           </a:xfrm>
           <a:prstGeom prst="rect">
             <a:avLst/>
@@ -2632,7 +3074,7 @@
           <a:bodyPr vert="horz" lIns="91440" tIns="45720" rIns="91440" bIns="45720" rtlCol="0" anchor="ctr"/>
           <a:lstStyle>
             <a:lvl1pPr algn="r">
-              <a:defRPr sz="1181">
+              <a:defRPr sz="1765">
                 <a:solidFill>
                   <a:schemeClr val="tx1">
                     <a:tint val="75000"/>
@@ -2644,7 +3086,7 @@
           <a:p>
             <a:fld id="{727024B5-A3DE-144E-AA20-5DAC5431DA34}" type="slidenum">
               <a:rPr lang="en-US" smtClean="0"/>
-              <a:t>‹#›</a:t>
+              <a:t>‹Nr.›</a:t>
             </a:fld>
             <a:endParaRPr lang="en-US"/>
           </a:p>
@@ -2653,27 +3095,27 @@
     </p:spTree>
     <p:extLst>
       <p:ext uri="{BB962C8B-B14F-4D97-AF65-F5344CB8AC3E}">
-        <p14:creationId xmlns:p14="http://schemas.microsoft.com/office/powerpoint/2010/main" val="2271656934"/>
+        <p14:creationId xmlns:p14="http://schemas.microsoft.com/office/powerpoint/2010/main" val="4048374444"/>
       </p:ext>
     </p:extLst>
   </p:cSld>
   <p:clrMap bg1="lt1" tx1="dk1" bg2="lt2" tx2="dk2" accent1="accent1" accent2="accent2" accent3="accent3" accent4="accent4" accent5="accent5" accent6="accent6" hlink="hlink" folHlink="folHlink"/>
   <p:sldLayoutIdLst>
-    <p:sldLayoutId id="2147483685" r:id="rId1"/>
-    <p:sldLayoutId id="2147483686" r:id="rId2"/>
-    <p:sldLayoutId id="2147483687" r:id="rId3"/>
-    <p:sldLayoutId id="2147483688" r:id="rId4"/>
-    <p:sldLayoutId id="2147483689" r:id="rId5"/>
-    <p:sldLayoutId id="2147483690" r:id="rId6"/>
-    <p:sldLayoutId id="2147483691" r:id="rId7"/>
-    <p:sldLayoutId id="2147483692" r:id="rId8"/>
-    <p:sldLayoutId id="2147483693" r:id="rId9"/>
-    <p:sldLayoutId id="2147483694" r:id="rId10"/>
-    <p:sldLayoutId id="2147483695" r:id="rId11"/>
+    <p:sldLayoutId id="2147483769" r:id="rId1"/>
+    <p:sldLayoutId id="2147483770" r:id="rId2"/>
+    <p:sldLayoutId id="2147483771" r:id="rId3"/>
+    <p:sldLayoutId id="2147483772" r:id="rId4"/>
+    <p:sldLayoutId id="2147483773" r:id="rId5"/>
+    <p:sldLayoutId id="2147483774" r:id="rId6"/>
+    <p:sldLayoutId id="2147483775" r:id="rId7"/>
+    <p:sldLayoutId id="2147483776" r:id="rId8"/>
+    <p:sldLayoutId id="2147483777" r:id="rId9"/>
+    <p:sldLayoutId id="2147483778" r:id="rId10"/>
+    <p:sldLayoutId id="2147483779" r:id="rId11"/>
   </p:sldLayoutIdLst>
   <p:txStyles>
     <p:titleStyle>
-      <a:lvl1pPr algn="l" defTabSz="899952" rtl="0" eaLnBrk="1" latinLnBrk="0" hangingPunct="1">
+      <a:lvl1pPr algn="l" defTabSz="1344900" rtl="0" eaLnBrk="1" latinLnBrk="0" hangingPunct="1">
         <a:lnSpc>
           <a:spcPct val="90000"/>
         </a:lnSpc>
@@ -2681,7 +3123,7 @@
           <a:spcPct val="0"/>
         </a:spcBef>
         <a:buNone/>
-        <a:defRPr sz="4330" kern="1200">
+        <a:defRPr sz="6472" kern="1200">
           <a:solidFill>
             <a:schemeClr val="tx1"/>
           </a:solidFill>
@@ -2692,16 +3134,16 @@
       </a:lvl1pPr>
     </p:titleStyle>
     <p:bodyStyle>
-      <a:lvl1pPr marL="224988" indent="-224988" algn="l" defTabSz="899952" rtl="0" eaLnBrk="1" latinLnBrk="0" hangingPunct="1">
+      <a:lvl1pPr marL="336225" indent="-336225" algn="l" defTabSz="1344900" rtl="0" eaLnBrk="1" latinLnBrk="0" hangingPunct="1">
         <a:lnSpc>
           <a:spcPct val="90000"/>
         </a:lnSpc>
         <a:spcBef>
-          <a:spcPts val="984"/>
+          <a:spcPts val="1471"/>
         </a:spcBef>
         <a:buFont typeface="Arial" panose="020B0604020202020204" pitchFamily="34" charset="0"/>
         <a:buChar char="•"/>
-        <a:defRPr sz="2756" kern="1200">
+        <a:defRPr sz="4118" kern="1200">
           <a:solidFill>
             <a:schemeClr val="tx1"/>
           </a:solidFill>
@@ -2710,16 +3152,16 @@
           <a:cs typeface="+mn-cs"/>
         </a:defRPr>
       </a:lvl1pPr>
-      <a:lvl2pPr marL="674964" indent="-224988" algn="l" defTabSz="899952" rtl="0" eaLnBrk="1" latinLnBrk="0" hangingPunct="1">
+      <a:lvl2pPr marL="1008675" indent="-336225" algn="l" defTabSz="1344900" rtl="0" eaLnBrk="1" latinLnBrk="0" hangingPunct="1">
         <a:lnSpc>
           <a:spcPct val="90000"/>
         </a:lnSpc>
         <a:spcBef>
-          <a:spcPts val="492"/>
+          <a:spcPts val="735"/>
         </a:spcBef>
         <a:buFont typeface="Arial" panose="020B0604020202020204" pitchFamily="34" charset="0"/>
         <a:buChar char="•"/>
-        <a:defRPr sz="2362" kern="1200">
+        <a:defRPr sz="3530" kern="1200">
           <a:solidFill>
             <a:schemeClr val="tx1"/>
           </a:solidFill>
@@ -2728,16 +3170,16 @@
           <a:cs typeface="+mn-cs"/>
         </a:defRPr>
       </a:lvl2pPr>
-      <a:lvl3pPr marL="1124941" indent="-224988" algn="l" defTabSz="899952" rtl="0" eaLnBrk="1" latinLnBrk="0" hangingPunct="1">
+      <a:lvl3pPr marL="1681124" indent="-336225" algn="l" defTabSz="1344900" rtl="0" eaLnBrk="1" latinLnBrk="0" hangingPunct="1">
         <a:lnSpc>
           <a:spcPct val="90000"/>
         </a:lnSpc>
         <a:spcBef>
-          <a:spcPts val="492"/>
+          <a:spcPts val="735"/>
         </a:spcBef>
         <a:buFont typeface="Arial" panose="020B0604020202020204" pitchFamily="34" charset="0"/>
         <a:buChar char="•"/>
-        <a:defRPr sz="1968" kern="1200">
+        <a:defRPr sz="2942" kern="1200">
           <a:solidFill>
             <a:schemeClr val="tx1"/>
           </a:solidFill>
@@ -2746,16 +3188,16 @@
           <a:cs typeface="+mn-cs"/>
         </a:defRPr>
       </a:lvl3pPr>
-      <a:lvl4pPr marL="1574917" indent="-224988" algn="l" defTabSz="899952" rtl="0" eaLnBrk="1" latinLnBrk="0" hangingPunct="1">
+      <a:lvl4pPr marL="2353574" indent="-336225" algn="l" defTabSz="1344900" rtl="0" eaLnBrk="1" latinLnBrk="0" hangingPunct="1">
         <a:lnSpc>
           <a:spcPct val="90000"/>
         </a:lnSpc>
         <a:spcBef>
-          <a:spcPts val="492"/>
+          <a:spcPts val="735"/>
         </a:spcBef>
         <a:buFont typeface="Arial" panose="020B0604020202020204" pitchFamily="34" charset="0"/>
         <a:buChar char="•"/>
-        <a:defRPr sz="1772" kern="1200">
+        <a:defRPr sz="2647" kern="1200">
           <a:solidFill>
             <a:schemeClr val="tx1"/>
           </a:solidFill>
@@ -2764,16 +3206,16 @@
           <a:cs typeface="+mn-cs"/>
         </a:defRPr>
       </a:lvl4pPr>
-      <a:lvl5pPr marL="2024893" indent="-224988" algn="l" defTabSz="899952" rtl="0" eaLnBrk="1" latinLnBrk="0" hangingPunct="1">
+      <a:lvl5pPr marL="3026024" indent="-336225" algn="l" defTabSz="1344900" rtl="0" eaLnBrk="1" latinLnBrk="0" hangingPunct="1">
         <a:lnSpc>
           <a:spcPct val="90000"/>
         </a:lnSpc>
         <a:spcBef>
-          <a:spcPts val="492"/>
+          <a:spcPts val="735"/>
         </a:spcBef>
         <a:buFont typeface="Arial" panose="020B0604020202020204" pitchFamily="34" charset="0"/>
         <a:buChar char="•"/>
-        <a:defRPr sz="1772" kern="1200">
+        <a:defRPr sz="2647" kern="1200">
           <a:solidFill>
             <a:schemeClr val="tx1"/>
           </a:solidFill>
@@ -2782,16 +3224,16 @@
           <a:cs typeface="+mn-cs"/>
         </a:defRPr>
       </a:lvl5pPr>
-      <a:lvl6pPr marL="2474869" indent="-224988" algn="l" defTabSz="899952" rtl="0" eaLnBrk="1" latinLnBrk="0" hangingPunct="1">
+      <a:lvl6pPr marL="3698474" indent="-336225" algn="l" defTabSz="1344900" rtl="0" eaLnBrk="1" latinLnBrk="0" hangingPunct="1">
         <a:lnSpc>
           <a:spcPct val="90000"/>
         </a:lnSpc>
         <a:spcBef>
-          <a:spcPts val="492"/>
+          <a:spcPts val="735"/>
         </a:spcBef>
         <a:buFont typeface="Arial" panose="020B0604020202020204" pitchFamily="34" charset="0"/>
         <a:buChar char="•"/>
-        <a:defRPr sz="1772" kern="1200">
+        <a:defRPr sz="2647" kern="1200">
           <a:solidFill>
             <a:schemeClr val="tx1"/>
           </a:solidFill>
@@ -2800,16 +3242,16 @@
           <a:cs typeface="+mn-cs"/>
         </a:defRPr>
       </a:lvl6pPr>
-      <a:lvl7pPr marL="2924846" indent="-224988" algn="l" defTabSz="899952" rtl="0" eaLnBrk="1" latinLnBrk="0" hangingPunct="1">
+      <a:lvl7pPr marL="4370923" indent="-336225" algn="l" defTabSz="1344900" rtl="0" eaLnBrk="1" latinLnBrk="0" hangingPunct="1">
         <a:lnSpc>
           <a:spcPct val="90000"/>
         </a:lnSpc>
         <a:spcBef>
-          <a:spcPts val="492"/>
+          <a:spcPts val="735"/>
         </a:spcBef>
         <a:buFont typeface="Arial" panose="020B0604020202020204" pitchFamily="34" charset="0"/>
         <a:buChar char="•"/>
-        <a:defRPr sz="1772" kern="1200">
+        <a:defRPr sz="2647" kern="1200">
           <a:solidFill>
             <a:schemeClr val="tx1"/>
           </a:solidFill>
@@ -2818,16 +3260,16 @@
           <a:cs typeface="+mn-cs"/>
         </a:defRPr>
       </a:lvl7pPr>
-      <a:lvl8pPr marL="3374822" indent="-224988" algn="l" defTabSz="899952" rtl="0" eaLnBrk="1" latinLnBrk="0" hangingPunct="1">
+      <a:lvl8pPr marL="5043373" indent="-336225" algn="l" defTabSz="1344900" rtl="0" eaLnBrk="1" latinLnBrk="0" hangingPunct="1">
         <a:lnSpc>
           <a:spcPct val="90000"/>
         </a:lnSpc>
         <a:spcBef>
-          <a:spcPts val="492"/>
+          <a:spcPts val="735"/>
         </a:spcBef>
         <a:buFont typeface="Arial" panose="020B0604020202020204" pitchFamily="34" charset="0"/>
         <a:buChar char="•"/>
-        <a:defRPr sz="1772" kern="1200">
+        <a:defRPr sz="2647" kern="1200">
           <a:solidFill>
             <a:schemeClr val="tx1"/>
           </a:solidFill>
@@ -2836,16 +3278,16 @@
           <a:cs typeface="+mn-cs"/>
         </a:defRPr>
       </a:lvl8pPr>
-      <a:lvl9pPr marL="3824798" indent="-224988" algn="l" defTabSz="899952" rtl="0" eaLnBrk="1" latinLnBrk="0" hangingPunct="1">
+      <a:lvl9pPr marL="5715823" indent="-336225" algn="l" defTabSz="1344900" rtl="0" eaLnBrk="1" latinLnBrk="0" hangingPunct="1">
         <a:lnSpc>
           <a:spcPct val="90000"/>
         </a:lnSpc>
         <a:spcBef>
-          <a:spcPts val="492"/>
+          <a:spcPts val="735"/>
         </a:spcBef>
         <a:buFont typeface="Arial" panose="020B0604020202020204" pitchFamily="34" charset="0"/>
         <a:buChar char="•"/>
-        <a:defRPr sz="1772" kern="1200">
+        <a:defRPr sz="2647" kern="1200">
           <a:solidFill>
             <a:schemeClr val="tx1"/>
           </a:solidFill>
@@ -2859,8 +3301,8 @@
       <a:defPPr>
         <a:defRPr lang="en-US"/>
       </a:defPPr>
-      <a:lvl1pPr marL="0" algn="l" defTabSz="899952" rtl="0" eaLnBrk="1" latinLnBrk="0" hangingPunct="1">
-        <a:defRPr sz="1772" kern="1200">
+      <a:lvl1pPr marL="0" algn="l" defTabSz="1344900" rtl="0" eaLnBrk="1" latinLnBrk="0" hangingPunct="1">
+        <a:defRPr sz="2647" kern="1200">
           <a:solidFill>
             <a:schemeClr val="tx1"/>
           </a:solidFill>
@@ -2869,8 +3311,8 @@
           <a:cs typeface="+mn-cs"/>
         </a:defRPr>
       </a:lvl1pPr>
-      <a:lvl2pPr marL="449976" algn="l" defTabSz="899952" rtl="0" eaLnBrk="1" latinLnBrk="0" hangingPunct="1">
-        <a:defRPr sz="1772" kern="1200">
+      <a:lvl2pPr marL="672450" algn="l" defTabSz="1344900" rtl="0" eaLnBrk="1" latinLnBrk="0" hangingPunct="1">
+        <a:defRPr sz="2647" kern="1200">
           <a:solidFill>
             <a:schemeClr val="tx1"/>
           </a:solidFill>
@@ -2879,8 +3321,8 @@
           <a:cs typeface="+mn-cs"/>
         </a:defRPr>
       </a:lvl2pPr>
-      <a:lvl3pPr marL="899952" algn="l" defTabSz="899952" rtl="0" eaLnBrk="1" latinLnBrk="0" hangingPunct="1">
-        <a:defRPr sz="1772" kern="1200">
+      <a:lvl3pPr marL="1344900" algn="l" defTabSz="1344900" rtl="0" eaLnBrk="1" latinLnBrk="0" hangingPunct="1">
+        <a:defRPr sz="2647" kern="1200">
           <a:solidFill>
             <a:schemeClr val="tx1"/>
           </a:solidFill>
@@ -2889,8 +3331,8 @@
           <a:cs typeface="+mn-cs"/>
         </a:defRPr>
       </a:lvl3pPr>
-      <a:lvl4pPr marL="1349929" algn="l" defTabSz="899952" rtl="0" eaLnBrk="1" latinLnBrk="0" hangingPunct="1">
-        <a:defRPr sz="1772" kern="1200">
+      <a:lvl4pPr marL="2017349" algn="l" defTabSz="1344900" rtl="0" eaLnBrk="1" latinLnBrk="0" hangingPunct="1">
+        <a:defRPr sz="2647" kern="1200">
           <a:solidFill>
             <a:schemeClr val="tx1"/>
           </a:solidFill>
@@ -2899,8 +3341,8 @@
           <a:cs typeface="+mn-cs"/>
         </a:defRPr>
       </a:lvl4pPr>
-      <a:lvl5pPr marL="1799905" algn="l" defTabSz="899952" rtl="0" eaLnBrk="1" latinLnBrk="0" hangingPunct="1">
-        <a:defRPr sz="1772" kern="1200">
+      <a:lvl5pPr marL="2689799" algn="l" defTabSz="1344900" rtl="0" eaLnBrk="1" latinLnBrk="0" hangingPunct="1">
+        <a:defRPr sz="2647" kern="1200">
           <a:solidFill>
             <a:schemeClr val="tx1"/>
           </a:solidFill>
@@ -2909,8 +3351,8 @@
           <a:cs typeface="+mn-cs"/>
         </a:defRPr>
       </a:lvl5pPr>
-      <a:lvl6pPr marL="2249881" algn="l" defTabSz="899952" rtl="0" eaLnBrk="1" latinLnBrk="0" hangingPunct="1">
-        <a:defRPr sz="1772" kern="1200">
+      <a:lvl6pPr marL="3362249" algn="l" defTabSz="1344900" rtl="0" eaLnBrk="1" latinLnBrk="0" hangingPunct="1">
+        <a:defRPr sz="2647" kern="1200">
           <a:solidFill>
             <a:schemeClr val="tx1"/>
           </a:solidFill>
@@ -2919,8 +3361,8 @@
           <a:cs typeface="+mn-cs"/>
         </a:defRPr>
       </a:lvl6pPr>
-      <a:lvl7pPr marL="2699857" algn="l" defTabSz="899952" rtl="0" eaLnBrk="1" latinLnBrk="0" hangingPunct="1">
-        <a:defRPr sz="1772" kern="1200">
+      <a:lvl7pPr marL="4034699" algn="l" defTabSz="1344900" rtl="0" eaLnBrk="1" latinLnBrk="0" hangingPunct="1">
+        <a:defRPr sz="2647" kern="1200">
           <a:solidFill>
             <a:schemeClr val="tx1"/>
           </a:solidFill>
@@ -2929,8 +3371,8 @@
           <a:cs typeface="+mn-cs"/>
         </a:defRPr>
       </a:lvl7pPr>
-      <a:lvl8pPr marL="3149834" algn="l" defTabSz="899952" rtl="0" eaLnBrk="1" latinLnBrk="0" hangingPunct="1">
-        <a:defRPr sz="1772" kern="1200">
+      <a:lvl8pPr marL="4707148" algn="l" defTabSz="1344900" rtl="0" eaLnBrk="1" latinLnBrk="0" hangingPunct="1">
+        <a:defRPr sz="2647" kern="1200">
           <a:solidFill>
             <a:schemeClr val="tx1"/>
           </a:solidFill>
@@ -2939,8 +3381,8 @@
           <a:cs typeface="+mn-cs"/>
         </a:defRPr>
       </a:lvl8pPr>
-      <a:lvl9pPr marL="3599810" algn="l" defTabSz="899952" rtl="0" eaLnBrk="1" latinLnBrk="0" hangingPunct="1">
-        <a:defRPr sz="1772" kern="1200">
+      <a:lvl9pPr marL="5379598" algn="l" defTabSz="1344900" rtl="0" eaLnBrk="1" latinLnBrk="0" hangingPunct="1">
+        <a:defRPr sz="2647" kern="1200">
           <a:solidFill>
             <a:schemeClr val="tx1"/>
           </a:solidFill>
@@ -2973,10 +3415,10 @@
       </p:grpSpPr>
       <p:sp>
         <p:nvSpPr>
-          <p:cNvPr id="17" name="Rechteck 16">
+          <p:cNvPr id="11" name="Rechteck 10">
             <a:extLst>
               <a:ext uri="{FF2B5EF4-FFF2-40B4-BE49-F238E27FC236}">
-                <a16:creationId xmlns:a16="http://schemas.microsoft.com/office/drawing/2014/main" id="{8B3D8995-A863-6CC5-4577-6DA69D3AB3C8}"/>
+                <a16:creationId xmlns:a16="http://schemas.microsoft.com/office/drawing/2014/main" id="{B3E02F88-3A66-A5DE-13B5-23F535053A28}"/>
               </a:ext>
             </a:extLst>
           </p:cNvPr>
@@ -2985,16 +3427,14 @@
         </p:nvSpPr>
         <p:spPr>
           <a:xfrm>
-            <a:off x="1176525" y="799124"/>
-            <a:ext cx="2488548" cy="5568219"/>
+            <a:off x="1" y="152400"/>
+            <a:ext cx="13449600" cy="4438185"/>
           </a:xfrm>
           <a:prstGeom prst="rect">
             <a:avLst/>
           </a:prstGeom>
           <a:solidFill>
-            <a:srgbClr val="E69F00">
-              <a:alpha val="18000"/>
-            </a:srgbClr>
+            <a:srgbClr val="FCF3DF"/>
           </a:solidFill>
           <a:ln>
             <a:noFill/>
@@ -3017,22 +3457,111 @@
           </a:fontRef>
         </p:style>
         <p:txBody>
-          <a:bodyPr rtlCol="0" anchor="ctr"/>
-          <a:lstStyle/>
-          <a:p>
-            <a:pPr algn="ctr"/>
-            <a:endParaRPr lang="en-US">
-              <a:latin typeface="Aptos Narrow" panose="020B0004020202020204" pitchFamily="34" charset="0"/>
+          <a:bodyPr lIns="270000" tIns="270000" rtlCol="0" anchor="t"/>
+          <a:lstStyle/>
+          <a:p>
+            <a:r>
+              <a:rPr lang="en-US" sz="6000" b="1" dirty="0">
+                <a:solidFill>
+                  <a:schemeClr val="tx1"/>
+                </a:solidFill>
+                <a:latin typeface="EB Garamond Medium" pitchFamily="2" charset="0"/>
+                <a:ea typeface="EB Garamond Medium" pitchFamily="2" charset="0"/>
+                <a:cs typeface="EB Garamond Medium" pitchFamily="2" charset="0"/>
+              </a:rPr>
+              <a:t>Build a model</a:t>
+            </a:r>
+          </a:p>
+          <a:p>
+            <a:endParaRPr lang="en-US" sz="2500" dirty="0">
+              <a:solidFill>
+                <a:schemeClr val="tx1"/>
+              </a:solidFill>
+              <a:latin typeface="EB Garamond Medium" pitchFamily="2" charset="0"/>
+              <a:ea typeface="EB Garamond Medium" pitchFamily="2" charset="0"/>
+              <a:cs typeface="EB Garamond Medium" pitchFamily="2" charset="0"/>
             </a:endParaRPr>
           </a:p>
-        </p:txBody>
-      </p:sp>
-      <p:sp>
-        <p:nvSpPr>
-          <p:cNvPr id="16" name="Pfeil nach unten 15">
+          <a:p>
+            <a:r>
+              <a:rPr lang="en-US" sz="4000" dirty="0">
+                <a:solidFill>
+                  <a:schemeClr val="tx1"/>
+                </a:solidFill>
+                <a:latin typeface="EB Garamond Medium" pitchFamily="2" charset="0"/>
+                <a:ea typeface="EB Garamond Medium" pitchFamily="2" charset="0"/>
+                <a:cs typeface="EB Garamond Medium" pitchFamily="2" charset="0"/>
+              </a:rPr>
+              <a:t>Model selection</a:t>
+            </a:r>
+          </a:p>
+          <a:p>
+            <a:r>
+              <a:rPr lang="en-US" sz="2800" dirty="0">
+                <a:solidFill>
+                  <a:schemeClr val="tx1"/>
+                </a:solidFill>
+                <a:latin typeface="EB Garamond Medium" pitchFamily="2" charset="0"/>
+                <a:ea typeface="EB Garamond Medium" pitchFamily="2" charset="0"/>
+                <a:cs typeface="EB Garamond Medium" pitchFamily="2" charset="0"/>
+              </a:rPr>
+              <a:t>Select a model that matches the research question and fulfills domain-specific requirements</a:t>
+            </a:r>
+          </a:p>
+          <a:p>
+            <a:endParaRPr lang="en-US" sz="2500" dirty="0">
+              <a:solidFill>
+                <a:schemeClr val="tx1"/>
+              </a:solidFill>
+              <a:latin typeface="EB Garamond Medium" pitchFamily="2" charset="0"/>
+              <a:ea typeface="EB Garamond Medium" pitchFamily="2" charset="0"/>
+              <a:cs typeface="EB Garamond Medium" pitchFamily="2" charset="0"/>
+            </a:endParaRPr>
+          </a:p>
+          <a:p>
+            <a:r>
+              <a:rPr lang="en-US" sz="4000" dirty="0">
+                <a:solidFill>
+                  <a:schemeClr val="tx1"/>
+                </a:solidFill>
+                <a:latin typeface="EB Garamond Medium" pitchFamily="2" charset="0"/>
+                <a:ea typeface="EB Garamond Medium" pitchFamily="2" charset="0"/>
+                <a:cs typeface="EB Garamond Medium" pitchFamily="2" charset="0"/>
+              </a:rPr>
+              <a:t>Model fit</a:t>
+            </a:r>
+          </a:p>
+          <a:p>
+            <a:r>
+              <a:rPr lang="en-US" sz="2800" dirty="0">
+                <a:solidFill>
+                  <a:schemeClr val="tx1"/>
+                </a:solidFill>
+                <a:latin typeface="EB Garamond Medium" pitchFamily="2" charset="0"/>
+                <a:ea typeface="EB Garamond Medium" pitchFamily="2" charset="0"/>
+                <a:cs typeface="EB Garamond Medium" pitchFamily="2" charset="0"/>
+              </a:rPr>
+              <a:t>Fit the model in your preferred framework (Frequentist, Bayesian, Machine learning)</a:t>
+            </a:r>
+          </a:p>
+          <a:p>
+            <a:endParaRPr lang="en-US" sz="2500" dirty="0">
+              <a:solidFill>
+                <a:schemeClr val="tx1"/>
+              </a:solidFill>
+              <a:latin typeface="EB Garamond Medium" pitchFamily="2" charset="0"/>
+              <a:ea typeface="EB Garamond Medium" pitchFamily="2" charset="0"/>
+              <a:cs typeface="EB Garamond Medium" pitchFamily="2" charset="0"/>
+            </a:endParaRPr>
+          </a:p>
+        </p:txBody>
+      </p:sp>
+      <p:sp>
+        <p:nvSpPr>
+          <p:cNvPr id="29" name="Rechteck 28">
             <a:extLst>
               <a:ext uri="{FF2B5EF4-FFF2-40B4-BE49-F238E27FC236}">
-                <a16:creationId xmlns:a16="http://schemas.microsoft.com/office/drawing/2014/main" id="{0072734A-0D8C-7310-0649-27729D0A796C}"/>
+                <a16:creationId xmlns:a16="http://schemas.microsoft.com/office/drawing/2014/main" id="{C2CB08F7-CC76-B331-D461-D3F1FB311AEE}"/>
               </a:ext>
             </a:extLst>
           </p:cNvPr>
@@ -3041,17 +3570,14 @@
         </p:nvSpPr>
         <p:spPr>
           <a:xfrm>
-            <a:off x="1450331" y="5014602"/>
-            <a:ext cx="471948" cy="2048145"/>
+            <a:off x="2" y="5340367"/>
+            <a:ext cx="9474196" cy="5523159"/>
           </a:xfrm>
-          <a:prstGeom prst="downArrow">
+          <a:prstGeom prst="rect">
             <a:avLst/>
           </a:prstGeom>
           <a:solidFill>
-            <a:schemeClr val="bg2">
-              <a:lumMod val="90000"/>
-              <a:alpha val="34782"/>
-            </a:schemeClr>
+            <a:srgbClr val="ECF6FC"/>
           </a:solidFill>
           <a:ln>
             <a:noFill/>
@@ -3074,22 +3600,186 @@
           </a:fontRef>
         </p:style>
         <p:txBody>
-          <a:bodyPr rtlCol="0" anchor="ctr"/>
-          <a:lstStyle/>
-          <a:p>
-            <a:pPr algn="ctr"/>
-            <a:endParaRPr lang="en-US">
-              <a:latin typeface="Aptos Narrow" panose="020B0004020202020204" pitchFamily="34" charset="0"/>
+          <a:bodyPr lIns="270000" tIns="270000" rtlCol="0" anchor="t"/>
+          <a:lstStyle/>
+          <a:p>
+            <a:r>
+              <a:rPr lang="en-US" sz="6000" b="1" dirty="0">
+                <a:solidFill>
+                  <a:schemeClr val="tx1"/>
+                </a:solidFill>
+                <a:latin typeface="EB Garamond Medium" pitchFamily="2" charset="0"/>
+                <a:ea typeface="EB Garamond Medium" pitchFamily="2" charset="0"/>
+                <a:cs typeface="EB Garamond Medium" pitchFamily="2" charset="0"/>
+              </a:rPr>
+              <a:t>Compute </a:t>
+            </a:r>
+            <a:r>
+              <a:rPr lang="en-US" sz="6000" b="1" dirty="0" err="1">
+                <a:solidFill>
+                  <a:schemeClr val="tx1"/>
+                </a:solidFill>
+                <a:latin typeface="EB Garamond Medium" pitchFamily="2" charset="0"/>
+                <a:ea typeface="EB Garamond Medium" pitchFamily="2" charset="0"/>
+                <a:cs typeface="EB Garamond Medium" pitchFamily="2" charset="0"/>
+              </a:rPr>
+              <a:t>estimand</a:t>
+            </a:r>
+            <a:r>
+              <a:rPr lang="en-US" sz="6000" b="1" dirty="0">
+                <a:solidFill>
+                  <a:schemeClr val="tx1"/>
+                </a:solidFill>
+                <a:latin typeface="EB Garamond Medium" pitchFamily="2" charset="0"/>
+                <a:ea typeface="EB Garamond Medium" pitchFamily="2" charset="0"/>
+                <a:cs typeface="EB Garamond Medium" pitchFamily="2" charset="0"/>
+              </a:rPr>
+              <a:t>(s)</a:t>
+            </a:r>
+          </a:p>
+          <a:p>
+            <a:endParaRPr lang="en-US" sz="2500" dirty="0">
+              <a:solidFill>
+                <a:schemeClr val="tx1"/>
+              </a:solidFill>
+              <a:latin typeface="EB Garamond Medium" pitchFamily="2" charset="0"/>
+              <a:ea typeface="EB Garamond Medium" pitchFamily="2" charset="0"/>
+              <a:cs typeface="EB Garamond Medium" pitchFamily="2" charset="0"/>
             </a:endParaRPr>
           </a:p>
-        </p:txBody>
-      </p:sp>
-      <p:sp>
-        <p:nvSpPr>
-          <p:cNvPr id="31" name="Rechteck 30">
+          <a:p>
+            <a:r>
+              <a:rPr lang="en-US" sz="4000" dirty="0">
+                <a:solidFill>
+                  <a:schemeClr val="tx1"/>
+                </a:solidFill>
+                <a:latin typeface="EB Garamond Medium" pitchFamily="2" charset="0"/>
+                <a:ea typeface="EB Garamond Medium" pitchFamily="2" charset="0"/>
+                <a:cs typeface="EB Garamond Medium" pitchFamily="2" charset="0"/>
+              </a:rPr>
+              <a:t>Target quantities</a:t>
+            </a:r>
+          </a:p>
+          <a:p>
+            <a:pPr marL="457200" indent="-457200">
+              <a:buFontTx/>
+              <a:buChar char="-"/>
+            </a:pPr>
+            <a:r>
+              <a:rPr lang="en-US" sz="2800" dirty="0">
+                <a:solidFill>
+                  <a:schemeClr val="tx1"/>
+                </a:solidFill>
+                <a:latin typeface="EB Garamond Medium" pitchFamily="2" charset="0"/>
+                <a:ea typeface="EB Garamond Medium" pitchFamily="2" charset="0"/>
+                <a:cs typeface="EB Garamond Medium" pitchFamily="2" charset="0"/>
+              </a:rPr>
+              <a:t>Predictions</a:t>
+            </a:r>
+          </a:p>
+          <a:p>
+            <a:pPr marL="457200" indent="-457200">
+              <a:buFontTx/>
+              <a:buChar char="-"/>
+            </a:pPr>
+            <a:r>
+              <a:rPr lang="en-US" sz="2800" dirty="0">
+                <a:solidFill>
+                  <a:schemeClr val="tx1"/>
+                </a:solidFill>
+                <a:latin typeface="EB Garamond Medium" pitchFamily="2" charset="0"/>
+                <a:ea typeface="EB Garamond Medium" pitchFamily="2" charset="0"/>
+                <a:cs typeface="EB Garamond Medium" pitchFamily="2" charset="0"/>
+              </a:rPr>
+              <a:t>Comparisons</a:t>
+            </a:r>
+          </a:p>
+          <a:p>
+            <a:pPr marL="457200" indent="-457200">
+              <a:buFontTx/>
+              <a:buChar char="-"/>
+            </a:pPr>
+            <a:r>
+              <a:rPr lang="en-US" sz="2800" dirty="0">
+                <a:solidFill>
+                  <a:schemeClr val="tx1"/>
+                </a:solidFill>
+                <a:latin typeface="EB Garamond Medium" pitchFamily="2" charset="0"/>
+                <a:ea typeface="EB Garamond Medium" pitchFamily="2" charset="0"/>
+                <a:cs typeface="EB Garamond Medium" pitchFamily="2" charset="0"/>
+              </a:rPr>
+              <a:t>Slopes</a:t>
+            </a:r>
+          </a:p>
+          <a:p>
+            <a:pPr marL="457200" indent="-457200">
+              <a:buFontTx/>
+              <a:buChar char="-"/>
+            </a:pPr>
+            <a:endParaRPr lang="en-US" sz="2500" dirty="0">
+              <a:solidFill>
+                <a:schemeClr val="tx1"/>
+              </a:solidFill>
+              <a:latin typeface="EB Garamond Medium" pitchFamily="2" charset="0"/>
+              <a:ea typeface="EB Garamond Medium" pitchFamily="2" charset="0"/>
+              <a:cs typeface="EB Garamond Medium" pitchFamily="2" charset="0"/>
+            </a:endParaRPr>
+          </a:p>
+          <a:p>
+            <a:r>
+              <a:rPr lang="en-US" sz="4000" dirty="0">
+                <a:solidFill>
+                  <a:schemeClr val="tx1"/>
+                </a:solidFill>
+                <a:latin typeface="EB Garamond Medium" pitchFamily="2" charset="0"/>
+                <a:ea typeface="EB Garamond Medium" pitchFamily="2" charset="0"/>
+                <a:cs typeface="EB Garamond Medium" pitchFamily="2" charset="0"/>
+              </a:rPr>
+              <a:t>Additional decisions </a:t>
+            </a:r>
+          </a:p>
+          <a:p>
+            <a:pPr marL="457200" indent="-457200">
+              <a:buFontTx/>
+              <a:buChar char="-"/>
+            </a:pPr>
+            <a:r>
+              <a:rPr lang="en-US" sz="2800" dirty="0">
+                <a:solidFill>
+                  <a:schemeClr val="tx1"/>
+                </a:solidFill>
+                <a:latin typeface="EB Garamond Medium" pitchFamily="2" charset="0"/>
+                <a:ea typeface="EB Garamond Medium" pitchFamily="2" charset="0"/>
+                <a:cs typeface="EB Garamond Medium" pitchFamily="2" charset="0"/>
+              </a:rPr>
+              <a:t>Unit-level estimates or averages</a:t>
+            </a:r>
+          </a:p>
+          <a:p>
+            <a:pPr marL="457200" indent="-457200">
+              <a:buFontTx/>
+              <a:buChar char="-"/>
+            </a:pPr>
+            <a:r>
+              <a:rPr lang="en-US" sz="2800" dirty="0">
+                <a:solidFill>
+                  <a:schemeClr val="tx1"/>
+                </a:solidFill>
+                <a:latin typeface="EB Garamond Medium" pitchFamily="2" charset="0"/>
+                <a:ea typeface="EB Garamond Medium" pitchFamily="2" charset="0"/>
+                <a:cs typeface="EB Garamond Medium" pitchFamily="2" charset="0"/>
+              </a:rPr>
+              <a:t>Choice of scale</a:t>
+            </a:r>
+          </a:p>
+        </p:txBody>
+      </p:sp>
+      <p:sp>
+        <p:nvSpPr>
+          <p:cNvPr id="32" name="Rechteck 31">
             <a:extLst>
               <a:ext uri="{FF2B5EF4-FFF2-40B4-BE49-F238E27FC236}">
-                <a16:creationId xmlns:a16="http://schemas.microsoft.com/office/drawing/2014/main" id="{BBEAF265-26D4-53A3-B039-059154D9411E}"/>
+                <a16:creationId xmlns:a16="http://schemas.microsoft.com/office/drawing/2014/main" id="{CD01B701-06EA-C5D4-F392-31A503442D9E}"/>
               </a:ext>
             </a:extLst>
           </p:cNvPr>
@@ -3098,16 +3788,14 @@
         </p:nvSpPr>
         <p:spPr>
           <a:xfrm>
-            <a:off x="1222495" y="6656208"/>
-            <a:ext cx="7091811" cy="1767450"/>
+            <a:off x="0" y="11498171"/>
+            <a:ext cx="13454735" cy="3157630"/>
           </a:xfrm>
           <a:prstGeom prst="rect">
             <a:avLst/>
           </a:prstGeom>
           <a:solidFill>
-            <a:srgbClr val="D55E00">
-              <a:alpha val="15497"/>
-            </a:srgbClr>
+            <a:srgbClr val="F8EDF3"/>
           </a:solidFill>
           <a:ln>
             <a:noFill/>
@@ -3130,885 +3818,310 @@
           </a:fontRef>
         </p:style>
         <p:txBody>
-          <a:bodyPr rtlCol="0" anchor="ctr"/>
-          <a:lstStyle/>
-          <a:p>
-            <a:pPr algn="ctr"/>
-            <a:endParaRPr lang="en-US"/>
-          </a:p>
-        </p:txBody>
-      </p:sp>
-      <p:sp>
-        <p:nvSpPr>
-          <p:cNvPr id="18" name="Rechteck 17">
+          <a:bodyPr lIns="270000" tIns="270000" rtlCol="0" anchor="t"/>
+          <a:lstStyle/>
+          <a:p>
+            <a:r>
+              <a:rPr lang="en-US" sz="6000" b="1" dirty="0">
+                <a:solidFill>
+                  <a:schemeClr val="tx1"/>
+                </a:solidFill>
+                <a:latin typeface="EB Garamond Medium" pitchFamily="2" charset="0"/>
+                <a:ea typeface="EB Garamond Medium" pitchFamily="2" charset="0"/>
+                <a:cs typeface="EB Garamond Medium" pitchFamily="2" charset="0"/>
+              </a:rPr>
+              <a:t>Statistical testing</a:t>
+            </a:r>
+          </a:p>
+          <a:p>
+            <a:endParaRPr lang="en-US" sz="2500" dirty="0">
+              <a:solidFill>
+                <a:schemeClr val="tx1"/>
+              </a:solidFill>
+              <a:latin typeface="EB Garamond Medium" pitchFamily="2" charset="0"/>
+              <a:ea typeface="EB Garamond Medium" pitchFamily="2" charset="0"/>
+              <a:cs typeface="EB Garamond Medium" pitchFamily="2" charset="0"/>
+            </a:endParaRPr>
+          </a:p>
+          <a:p>
+            <a:r>
+              <a:rPr lang="en-US" sz="2800" dirty="0">
+                <a:solidFill>
+                  <a:schemeClr val="tx1"/>
+                </a:solidFill>
+                <a:latin typeface="EB Garamond Medium" pitchFamily="2" charset="0"/>
+                <a:ea typeface="EB Garamond Medium" pitchFamily="2" charset="0"/>
+                <a:cs typeface="EB Garamond Medium" pitchFamily="2" charset="0"/>
+              </a:rPr>
+              <a:t>Uncertainty quantification</a:t>
+            </a:r>
+          </a:p>
+          <a:p>
+            <a:r>
+              <a:rPr lang="en-US" sz="2800" dirty="0">
+                <a:solidFill>
+                  <a:schemeClr val="tx1"/>
+                </a:solidFill>
+                <a:latin typeface="EB Garamond Medium" pitchFamily="2" charset="0"/>
+                <a:ea typeface="EB Garamond Medium" pitchFamily="2" charset="0"/>
+                <a:cs typeface="EB Garamond Medium" pitchFamily="2" charset="0"/>
+              </a:rPr>
+              <a:t>Null hypothesis tests</a:t>
+            </a:r>
+          </a:p>
+          <a:p>
+            <a:r>
+              <a:rPr lang="en-US" sz="2800" dirty="0">
+                <a:solidFill>
+                  <a:schemeClr val="tx1"/>
+                </a:solidFill>
+                <a:latin typeface="EB Garamond Medium" pitchFamily="2" charset="0"/>
+                <a:ea typeface="EB Garamond Medium" pitchFamily="2" charset="0"/>
+                <a:cs typeface="EB Garamond Medium" pitchFamily="2" charset="0"/>
+              </a:rPr>
+              <a:t>Equivalence tests</a:t>
+            </a:r>
+          </a:p>
+        </p:txBody>
+      </p:sp>
+      <p:cxnSp>
+        <p:nvCxnSpPr>
+          <p:cNvPr id="50" name="Gerade Verbindung mit Pfeil 49">
             <a:extLst>
               <a:ext uri="{FF2B5EF4-FFF2-40B4-BE49-F238E27FC236}">
-                <a16:creationId xmlns:a16="http://schemas.microsoft.com/office/drawing/2014/main" id="{C1FF61F6-3A40-6EA4-D2D4-966684B0C19B}"/>
+                <a16:creationId xmlns:a16="http://schemas.microsoft.com/office/drawing/2014/main" id="{6E2CAFFF-88DB-91C5-DEE3-FFAEC63DDF25}"/>
               </a:ext>
             </a:extLst>
           </p:cNvPr>
-          <p:cNvSpPr/>
+          <p:cNvCxnSpPr>
+            <a:cxnSpLocks/>
+          </p:cNvCxnSpPr>
           <p:nvPr/>
-        </p:nvSpPr>
+        </p:nvCxnSpPr>
         <p:spPr>
           <a:xfrm>
-            <a:off x="4290681" y="786580"/>
-            <a:ext cx="4023626" cy="5568219"/>
+            <a:off x="391891" y="4586871"/>
+            <a:ext cx="0" cy="753494"/>
           </a:xfrm>
-          <a:prstGeom prst="rect">
+          <a:prstGeom prst="straightConnector1">
             <a:avLst/>
           </a:prstGeom>
-          <a:solidFill>
-            <a:srgbClr val="CC79A7">
-              <a:alpha val="28000"/>
-            </a:srgbClr>
-          </a:solidFill>
-          <a:ln>
-            <a:noFill/>
+          <a:ln w="76200">
+            <a:solidFill>
+              <a:schemeClr val="bg1">
+                <a:lumMod val="50000"/>
+              </a:schemeClr>
+            </a:solidFill>
+            <a:tailEnd type="triangle"/>
           </a:ln>
         </p:spPr>
         <p:style>
-          <a:lnRef idx="2">
-            <a:schemeClr val="accent1">
-              <a:shade val="15000"/>
-            </a:schemeClr>
-          </a:lnRef>
-          <a:fillRef idx="1">
-            <a:schemeClr val="accent1"/>
-          </a:fillRef>
-          <a:effectRef idx="0">
-            <a:schemeClr val="accent1"/>
-          </a:effectRef>
-          <a:fontRef idx="minor">
-            <a:schemeClr val="lt1"/>
-          </a:fontRef>
-        </p:style>
-        <p:txBody>
-          <a:bodyPr rtlCol="0" anchor="ctr"/>
-          <a:lstStyle/>
-          <a:p>
-            <a:pPr algn="ctr"/>
-            <a:endParaRPr lang="en-US">
-              <a:latin typeface="Aptos Narrow" panose="020B0004020202020204" pitchFamily="34" charset="0"/>
-            </a:endParaRPr>
-          </a:p>
-        </p:txBody>
-      </p:sp>
-      <p:sp>
-        <p:nvSpPr>
-          <p:cNvPr id="4" name="Rechteck 3">
-            <a:extLst>
-              <a:ext uri="{FF2B5EF4-FFF2-40B4-BE49-F238E27FC236}">
-                <a16:creationId xmlns:a16="http://schemas.microsoft.com/office/drawing/2014/main" id="{FC6AEAB5-5D8E-653D-46AF-150B4DF7C411}"/>
-              </a:ext>
-            </a:extLst>
-          </p:cNvPr>
-          <p:cNvSpPr/>
-          <p:nvPr/>
-        </p:nvSpPr>
-        <p:spPr>
-          <a:xfrm>
-            <a:off x="1301183" y="871842"/>
-            <a:ext cx="2321171" cy="1693291"/>
-          </a:xfrm>
-          <a:prstGeom prst="rect">
-            <a:avLst/>
-          </a:prstGeom>
-          <a:ln>
-            <a:noFill/>
-          </a:ln>
-        </p:spPr>
-        <p:style>
-          <a:lnRef idx="2">
+          <a:lnRef idx="1">
             <a:schemeClr val="dk1"/>
           </a:lnRef>
-          <a:fillRef idx="1">
-            <a:schemeClr val="lt1"/>
+          <a:fillRef idx="0">
+            <a:schemeClr val="dk1"/>
           </a:fillRef>
           <a:effectRef idx="0">
             <a:schemeClr val="dk1"/>
           </a:effectRef>
           <a:fontRef idx="minor">
-            <a:schemeClr val="dk1"/>
+            <a:schemeClr val="tx1"/>
           </a:fontRef>
         </p:style>
-        <p:txBody>
-          <a:bodyPr rtlCol="0" anchor="t"/>
-          <a:lstStyle/>
-          <a:p>
-            <a:pPr algn="ctr"/>
-            <a:r>
-              <a:rPr lang="en-US" sz="1400" dirty="0">
-                <a:latin typeface="Aptos Narrow" panose="020B0004020202020204" pitchFamily="34" charset="0"/>
-              </a:rPr>
-              <a:t>Model selection</a:t>
-            </a:r>
-          </a:p>
-          <a:p>
-            <a:r>
-              <a:rPr lang="en-US" sz="1000" dirty="0">
-                <a:latin typeface="Aptos Narrow" panose="020B0004020202020204" pitchFamily="34" charset="0"/>
-              </a:rPr>
-              <a:t>Design a model that matches the research question and fulfills domain-specific requirements, for example:</a:t>
-            </a:r>
-          </a:p>
-          <a:p>
-            <a:pPr marL="285750" indent="-285750">
-              <a:buFontTx/>
-              <a:buChar char="-"/>
-            </a:pPr>
-            <a:r>
-              <a:rPr lang="en-US" sz="1000" dirty="0">
-                <a:latin typeface="Aptos Narrow" panose="020B0004020202020204" pitchFamily="34" charset="0"/>
-              </a:rPr>
-              <a:t>control for confounders</a:t>
-            </a:r>
-          </a:p>
-          <a:p>
-            <a:pPr marL="285750" indent="-285750">
-              <a:buFontTx/>
-              <a:buChar char="-"/>
-            </a:pPr>
-            <a:r>
-              <a:rPr lang="en-US" sz="1000" dirty="0">
-                <a:latin typeface="Aptos Narrow" panose="020B0004020202020204" pitchFamily="34" charset="0"/>
-              </a:rPr>
-              <a:t>capturing aspects of  the data-generating process</a:t>
-            </a:r>
-          </a:p>
-          <a:p>
-            <a:pPr marL="285750" indent="-285750">
-              <a:buFontTx/>
-              <a:buChar char="-"/>
-            </a:pPr>
-            <a:r>
-              <a:rPr lang="en-US" sz="1000" dirty="0">
-                <a:latin typeface="Aptos Narrow" panose="020B0004020202020204" pitchFamily="34" charset="0"/>
-              </a:rPr>
-              <a:t>goodness of fit, within-sample or out-of-sample</a:t>
-            </a:r>
-          </a:p>
-          <a:p>
-            <a:pPr marL="285750" indent="-285750">
-              <a:buFontTx/>
-              <a:buChar char="-"/>
-            </a:pPr>
-            <a:r>
-              <a:rPr lang="en-US" sz="1000" dirty="0">
-                <a:latin typeface="Aptos Narrow" panose="020B0004020202020204" pitchFamily="34" charset="0"/>
-              </a:rPr>
-              <a:t>…</a:t>
-            </a:r>
-          </a:p>
-        </p:txBody>
-      </p:sp>
-      <p:sp>
-        <p:nvSpPr>
-          <p:cNvPr id="5" name="Rechteck 4">
+      </p:cxnSp>
+      <p:cxnSp>
+        <p:nvCxnSpPr>
+          <p:cNvPr id="51" name="Gerade Verbindung mit Pfeil 50">
             <a:extLst>
               <a:ext uri="{FF2B5EF4-FFF2-40B4-BE49-F238E27FC236}">
-                <a16:creationId xmlns:a16="http://schemas.microsoft.com/office/drawing/2014/main" id="{DA89A1C3-EF5A-C4E2-AE13-2B4B83DAE55F}"/>
+                <a16:creationId xmlns:a16="http://schemas.microsoft.com/office/drawing/2014/main" id="{FEAF88D2-B540-80C2-5ED7-4EEA83849C9D}"/>
               </a:ext>
             </a:extLst>
           </p:cNvPr>
-          <p:cNvSpPr/>
+          <p:cNvCxnSpPr>
+            <a:cxnSpLocks/>
+          </p:cNvCxnSpPr>
           <p:nvPr/>
-        </p:nvSpPr>
+        </p:nvCxnSpPr>
         <p:spPr>
           <a:xfrm>
-            <a:off x="1276870" y="3438209"/>
-            <a:ext cx="2321171" cy="1117015"/>
+            <a:off x="391891" y="10863526"/>
+            <a:ext cx="0" cy="634644"/>
           </a:xfrm>
-          <a:prstGeom prst="rect">
+          <a:prstGeom prst="straightConnector1">
             <a:avLst/>
           </a:prstGeom>
-          <a:ln>
-            <a:noFill/>
+          <a:ln w="76200">
+            <a:solidFill>
+              <a:schemeClr val="bg1">
+                <a:lumMod val="50000"/>
+              </a:schemeClr>
+            </a:solidFill>
+            <a:tailEnd type="triangle"/>
           </a:ln>
         </p:spPr>
         <p:style>
-          <a:lnRef idx="2">
+          <a:lnRef idx="1">
             <a:schemeClr val="dk1"/>
           </a:lnRef>
-          <a:fillRef idx="1">
-            <a:schemeClr val="lt1"/>
+          <a:fillRef idx="0">
+            <a:schemeClr val="dk1"/>
           </a:fillRef>
           <a:effectRef idx="0">
             <a:schemeClr val="dk1"/>
           </a:effectRef>
           <a:fontRef idx="minor">
-            <a:schemeClr val="dk1"/>
+            <a:schemeClr val="tx1"/>
           </a:fontRef>
         </p:style>
-        <p:txBody>
-          <a:bodyPr rtlCol="0" anchor="t"/>
-          <a:lstStyle/>
-          <a:p>
-            <a:pPr algn="ctr"/>
-            <a:r>
-              <a:rPr lang="en-US" sz="1400" dirty="0">
-                <a:latin typeface="Aptos Narrow" panose="020B0004020202020204" pitchFamily="34" charset="0"/>
-              </a:rPr>
-              <a:t>Model fitting</a:t>
-            </a:r>
-          </a:p>
-          <a:p>
-            <a:r>
-              <a:rPr lang="en-US" sz="1000" dirty="0">
-                <a:latin typeface="Aptos Narrow" panose="020B0004020202020204" pitchFamily="34" charset="0"/>
-              </a:rPr>
-              <a:t>Fit the statistical model within your preferred framework</a:t>
-            </a:r>
-          </a:p>
-          <a:p>
-            <a:pPr marL="171450" indent="-171450">
-              <a:buFontTx/>
-              <a:buChar char="-"/>
-            </a:pPr>
-            <a:r>
-              <a:rPr lang="en-US" sz="1000" dirty="0">
-                <a:latin typeface="Aptos Narrow" panose="020B0004020202020204" pitchFamily="34" charset="0"/>
-              </a:rPr>
-              <a:t>Bayesian model</a:t>
-            </a:r>
-          </a:p>
-          <a:p>
-            <a:pPr marL="171450" indent="-171450">
-              <a:buFontTx/>
-              <a:buChar char="-"/>
-            </a:pPr>
-            <a:r>
-              <a:rPr lang="en-US" sz="1000" dirty="0">
-                <a:latin typeface="Aptos Narrow" panose="020B0004020202020204" pitchFamily="34" charset="0"/>
-              </a:rPr>
-              <a:t>Frequentist model</a:t>
-            </a:r>
-          </a:p>
-          <a:p>
-            <a:pPr marL="171450" indent="-171450">
-              <a:buFontTx/>
-              <a:buChar char="-"/>
-            </a:pPr>
-            <a:r>
-              <a:rPr lang="en-US" sz="1000" dirty="0">
-                <a:latin typeface="Aptos Narrow" panose="020B0004020202020204" pitchFamily="34" charset="0"/>
-              </a:rPr>
-              <a:t>machine learning model</a:t>
-            </a:r>
-          </a:p>
-        </p:txBody>
-      </p:sp>
-      <p:sp>
-        <p:nvSpPr>
-          <p:cNvPr id="6" name="Rechteck 5">
+      </p:cxnSp>
+      <p:sp>
+        <p:nvSpPr>
+          <p:cNvPr id="53" name="Textfeld 52">
             <a:extLst>
               <a:ext uri="{FF2B5EF4-FFF2-40B4-BE49-F238E27FC236}">
-                <a16:creationId xmlns:a16="http://schemas.microsoft.com/office/drawing/2014/main" id="{FE2CBB99-55A3-D5DD-3BE9-4FE1B46073D2}"/>
+                <a16:creationId xmlns:a16="http://schemas.microsoft.com/office/drawing/2014/main" id="{78A6383D-678F-DEE0-BF7B-5E0A43525291}"/>
               </a:ext>
             </a:extLst>
           </p:cNvPr>
-          <p:cNvSpPr/>
+          <p:cNvSpPr txBox="1"/>
           <p:nvPr/>
         </p:nvSpPr>
         <p:spPr>
           <a:xfrm>
-            <a:off x="4388722" y="865170"/>
-            <a:ext cx="3816000" cy="464229"/>
+            <a:off x="648033" y="4702008"/>
+            <a:ext cx="4871026" cy="523220"/>
           </a:xfrm>
           <a:prstGeom prst="rect">
             <a:avLst/>
           </a:prstGeom>
+          <a:noFill/>
           <a:ln>
             <a:noFill/>
           </a:ln>
         </p:spPr>
+        <p:txBody>
+          <a:bodyPr wrap="square" rtlCol="0">
+            <a:spAutoFit/>
+          </a:bodyPr>
+          <a:lstStyle/>
+          <a:p>
+            <a:r>
+              <a:rPr lang="en-US" sz="2800" dirty="0">
+                <a:solidFill>
+                  <a:schemeClr val="bg1">
+                    <a:lumMod val="50000"/>
+                  </a:schemeClr>
+                </a:solidFill>
+                <a:latin typeface="EB Garamond Medium" pitchFamily="2" charset="0"/>
+                <a:ea typeface="EB Garamond Medium" pitchFamily="2" charset="0"/>
+                <a:cs typeface="EB Garamond Medium" pitchFamily="2" charset="0"/>
+              </a:rPr>
+              <a:t>Prediction machines workflow</a:t>
+            </a:r>
+          </a:p>
+        </p:txBody>
+      </p:sp>
+      <p:sp>
+        <p:nvSpPr>
+          <p:cNvPr id="54" name="Textfeld 53">
+            <a:extLst>
+              <a:ext uri="{FF2B5EF4-FFF2-40B4-BE49-F238E27FC236}">
+                <a16:creationId xmlns:a16="http://schemas.microsoft.com/office/drawing/2014/main" id="{9CD70064-0CA9-ECAC-6DD1-7C32A1B889B0}"/>
+              </a:ext>
+            </a:extLst>
+          </p:cNvPr>
+          <p:cNvSpPr txBox="1"/>
+          <p:nvPr/>
+        </p:nvSpPr>
+        <p:spPr>
+          <a:xfrm>
+            <a:off x="659731" y="10919238"/>
+            <a:ext cx="7059054" cy="523220"/>
+          </a:xfrm>
+          <a:prstGeom prst="rect">
+            <a:avLst/>
+          </a:prstGeom>
+          <a:noFill/>
+          <a:ln>
+            <a:noFill/>
+          </a:ln>
+        </p:spPr>
+        <p:txBody>
+          <a:bodyPr wrap="square" rtlCol="0">
+            <a:spAutoFit/>
+          </a:bodyPr>
+          <a:lstStyle/>
+          <a:p>
+            <a:r>
+              <a:rPr lang="en-US" sz="2800" dirty="0">
+                <a:solidFill>
+                  <a:schemeClr val="bg1">
+                    <a:lumMod val="50000"/>
+                  </a:schemeClr>
+                </a:solidFill>
+                <a:latin typeface="EB Garamond Medium" pitchFamily="2" charset="0"/>
+                <a:ea typeface="EB Garamond Medium" pitchFamily="2" charset="0"/>
+                <a:cs typeface="EB Garamond Medium" pitchFamily="2" charset="0"/>
+              </a:rPr>
+              <a:t>Prediction machines workflow</a:t>
+            </a:r>
+          </a:p>
+        </p:txBody>
+      </p:sp>
+      <p:cxnSp>
+        <p:nvCxnSpPr>
+          <p:cNvPr id="55" name="Gerade Verbindung mit Pfeil 54">
+            <a:extLst>
+              <a:ext uri="{FF2B5EF4-FFF2-40B4-BE49-F238E27FC236}">
+                <a16:creationId xmlns:a16="http://schemas.microsoft.com/office/drawing/2014/main" id="{7D6FDD2B-16F3-40B3-02ED-FC43E16F8524}"/>
+              </a:ext>
+            </a:extLst>
+          </p:cNvPr>
+          <p:cNvCxnSpPr>
+            <a:cxnSpLocks/>
+          </p:cNvCxnSpPr>
+          <p:nvPr/>
+        </p:nvCxnSpPr>
+        <p:spPr>
+          <a:xfrm>
+            <a:off x="9994711" y="4586871"/>
+            <a:ext cx="0" cy="6911299"/>
+          </a:xfrm>
+          <a:prstGeom prst="straightConnector1">
+            <a:avLst/>
+          </a:prstGeom>
+          <a:ln w="76200">
+            <a:solidFill>
+              <a:schemeClr val="bg1">
+                <a:lumMod val="75000"/>
+              </a:schemeClr>
+            </a:solidFill>
+            <a:tailEnd type="triangle"/>
+          </a:ln>
+        </p:spPr>
         <p:style>
-          <a:lnRef idx="2">
+          <a:lnRef idx="1">
             <a:schemeClr val="dk1"/>
           </a:lnRef>
-          <a:fillRef idx="1">
-            <a:schemeClr val="lt1"/>
+          <a:fillRef idx="0">
+            <a:schemeClr val="dk1"/>
           </a:fillRef>
           <a:effectRef idx="0">
             <a:schemeClr val="dk1"/>
           </a:effectRef>
           <a:fontRef idx="minor">
-            <a:schemeClr val="dk1"/>
+            <a:schemeClr val="tx1"/>
           </a:fontRef>
         </p:style>
-        <p:txBody>
-          <a:bodyPr rtlCol="0" anchor="t"/>
-          <a:lstStyle/>
-          <a:p>
-            <a:pPr algn="ctr"/>
-            <a:r>
-              <a:rPr lang="en-US" sz="1400" dirty="0">
-                <a:latin typeface="Aptos Narrow" panose="020B0004020202020204" pitchFamily="34" charset="0"/>
-              </a:rPr>
-              <a:t>Target quantity selection</a:t>
-            </a:r>
-          </a:p>
-          <a:p>
-            <a:r>
-              <a:rPr lang="en-US" sz="1000" dirty="0">
-                <a:latin typeface="Aptos Narrow" panose="020B0004020202020204" pitchFamily="34" charset="0"/>
-              </a:rPr>
-              <a:t>Select one or multiple target quantities to answer the research question.</a:t>
-            </a:r>
-          </a:p>
-        </p:txBody>
-      </p:sp>
-      <p:sp>
-        <p:nvSpPr>
-          <p:cNvPr id="7" name="Rechteck 6">
+      </p:cxnSp>
+      <p:sp>
+        <p:nvSpPr>
+          <p:cNvPr id="57" name="Textfeld 56">
             <a:extLst>
               <a:ext uri="{FF2B5EF4-FFF2-40B4-BE49-F238E27FC236}">
-                <a16:creationId xmlns:a16="http://schemas.microsoft.com/office/drawing/2014/main" id="{B4AA14A7-5BCB-1A0F-8FCA-5C0D41EFFC0E}"/>
-              </a:ext>
-            </a:extLst>
-          </p:cNvPr>
-          <p:cNvSpPr/>
-          <p:nvPr/>
-        </p:nvSpPr>
-        <p:spPr>
-          <a:xfrm>
-            <a:off x="4388723" y="1399942"/>
-            <a:ext cx="1558277" cy="844563"/>
-          </a:xfrm>
-          <a:prstGeom prst="rect">
-            <a:avLst/>
-          </a:prstGeom>
-          <a:ln>
-            <a:noFill/>
-          </a:ln>
-        </p:spPr>
-        <p:style>
-          <a:lnRef idx="2">
-            <a:schemeClr val="dk1"/>
-          </a:lnRef>
-          <a:fillRef idx="1">
-            <a:schemeClr val="lt1"/>
-          </a:fillRef>
-          <a:effectRef idx="0">
-            <a:schemeClr val="dk1"/>
-          </a:effectRef>
-          <a:fontRef idx="minor">
-            <a:schemeClr val="dk1"/>
-          </a:fontRef>
-        </p:style>
-        <p:txBody>
-          <a:bodyPr rtlCol="0" anchor="t"/>
-          <a:lstStyle/>
-          <a:p>
-            <a:pPr algn="ctr"/>
-            <a:r>
-              <a:rPr lang="en-US" sz="1400" dirty="0">
-                <a:latin typeface="Aptos Narrow" panose="020B0004020202020204" pitchFamily="34" charset="0"/>
-              </a:rPr>
-              <a:t>Predictions</a:t>
-            </a:r>
-          </a:p>
-          <a:p>
-            <a:r>
-              <a:rPr lang="en-US" sz="1000" i="1" dirty="0">
-                <a:latin typeface="Aptos Narrow" panose="020B0004020202020204" pitchFamily="34" charset="0"/>
-              </a:rPr>
-              <a:t>What is the expected outcome for different types of people/units?</a:t>
-            </a:r>
-          </a:p>
-          <a:p>
-            <a:endParaRPr lang="en-US" sz="1000" dirty="0">
-              <a:latin typeface="Aptos Narrow" panose="020B0004020202020204" pitchFamily="34" charset="0"/>
-            </a:endParaRPr>
-          </a:p>
-        </p:txBody>
-      </p:sp>
-      <p:sp>
-        <p:nvSpPr>
-          <p:cNvPr id="8" name="Rechteck 7">
-            <a:extLst>
-              <a:ext uri="{FF2B5EF4-FFF2-40B4-BE49-F238E27FC236}">
-                <a16:creationId xmlns:a16="http://schemas.microsoft.com/office/drawing/2014/main" id="{9AA698FD-C6FC-1159-B189-13E934848419}"/>
-              </a:ext>
-            </a:extLst>
-          </p:cNvPr>
-          <p:cNvSpPr/>
-          <p:nvPr/>
-        </p:nvSpPr>
-        <p:spPr>
-          <a:xfrm>
-            <a:off x="6066521" y="1401872"/>
-            <a:ext cx="2140941" cy="842632"/>
-          </a:xfrm>
-          <a:prstGeom prst="rect">
-            <a:avLst/>
-          </a:prstGeom>
-          <a:ln>
-            <a:noFill/>
-          </a:ln>
-        </p:spPr>
-        <p:style>
-          <a:lnRef idx="2">
-            <a:schemeClr val="dk1"/>
-          </a:lnRef>
-          <a:fillRef idx="1">
-            <a:schemeClr val="lt1"/>
-          </a:fillRef>
-          <a:effectRef idx="0">
-            <a:schemeClr val="dk1"/>
-          </a:effectRef>
-          <a:fontRef idx="minor">
-            <a:schemeClr val="dk1"/>
-          </a:fontRef>
-        </p:style>
-        <p:txBody>
-          <a:bodyPr rtlCol="0" anchor="t"/>
-          <a:lstStyle/>
-          <a:p>
-            <a:pPr algn="ctr"/>
-            <a:r>
-              <a:rPr lang="en-US" sz="1400" dirty="0">
-                <a:latin typeface="Aptos Narrow" panose="020B0004020202020204" pitchFamily="34" charset="0"/>
-              </a:rPr>
-              <a:t>Comparisons and slopes</a:t>
-            </a:r>
-          </a:p>
-          <a:p>
-            <a:r>
-              <a:rPr lang="en-US" sz="1000" i="1" dirty="0">
-                <a:latin typeface="Aptos Narrow" panose="020B0004020202020204" pitchFamily="34" charset="0"/>
-              </a:rPr>
-              <a:t>How does the expected outcome change when one or more predictors change?</a:t>
-            </a:r>
-          </a:p>
-        </p:txBody>
-      </p:sp>
-      <p:sp>
-        <p:nvSpPr>
-          <p:cNvPr id="9" name="Rechteck 8">
-            <a:extLst>
-              <a:ext uri="{FF2B5EF4-FFF2-40B4-BE49-F238E27FC236}">
-                <a16:creationId xmlns:a16="http://schemas.microsoft.com/office/drawing/2014/main" id="{D3BB34A7-CDEB-7817-44C0-ADE6F68F8743}"/>
-              </a:ext>
-            </a:extLst>
-          </p:cNvPr>
-          <p:cNvSpPr/>
-          <p:nvPr/>
-        </p:nvSpPr>
-        <p:spPr>
-          <a:xfrm>
-            <a:off x="4843598" y="2581778"/>
-            <a:ext cx="2917795" cy="1563886"/>
-          </a:xfrm>
-          <a:prstGeom prst="rect">
-            <a:avLst/>
-          </a:prstGeom>
-          <a:ln>
-            <a:noFill/>
-          </a:ln>
-        </p:spPr>
-        <p:style>
-          <a:lnRef idx="2">
-            <a:schemeClr val="dk1"/>
-          </a:lnRef>
-          <a:fillRef idx="1">
-            <a:schemeClr val="lt1"/>
-          </a:fillRef>
-          <a:effectRef idx="0">
-            <a:schemeClr val="dk1"/>
-          </a:effectRef>
-          <a:fontRef idx="minor">
-            <a:schemeClr val="dk1"/>
-          </a:fontRef>
-        </p:style>
-        <p:txBody>
-          <a:bodyPr rtlCol="0" anchor="t"/>
-          <a:lstStyle/>
-          <a:p>
-            <a:pPr algn="ctr"/>
-            <a:r>
-              <a:rPr lang="en-US" sz="1400" dirty="0">
-                <a:latin typeface="Aptos Narrow" panose="020B0004020202020204" pitchFamily="34" charset="0"/>
-              </a:rPr>
-              <a:t>Averaging (or not)</a:t>
-            </a:r>
-          </a:p>
-          <a:p>
-            <a:r>
-              <a:rPr lang="en-US" sz="1000" dirty="0">
-                <a:latin typeface="Aptos Narrow" panose="020B0004020202020204" pitchFamily="34" charset="0"/>
-              </a:rPr>
-              <a:t>Decide for which unites to calculate target quantities.</a:t>
-            </a:r>
-          </a:p>
-          <a:p>
-            <a:pPr marL="171450" indent="-171450">
-              <a:buFontTx/>
-              <a:buChar char="-"/>
-            </a:pPr>
-            <a:r>
-              <a:rPr lang="en-US" sz="1000" dirty="0">
-                <a:latin typeface="Aptos Narrow" panose="020B0004020202020204" pitchFamily="34" charset="0"/>
-              </a:rPr>
-              <a:t>unit-level estimates</a:t>
-            </a:r>
-          </a:p>
-          <a:p>
-            <a:pPr marL="628650" lvl="1" indent="-171450">
-              <a:buFontTx/>
-              <a:buChar char="-"/>
-            </a:pPr>
-            <a:r>
-              <a:rPr lang="en-US" sz="1000" dirty="0">
-                <a:latin typeface="Aptos Narrow" panose="020B0004020202020204" pitchFamily="34" charset="0"/>
-              </a:rPr>
-              <a:t>at observed values</a:t>
-            </a:r>
-          </a:p>
-          <a:p>
-            <a:pPr marL="628650" lvl="1" indent="-171450">
-              <a:buFontTx/>
-              <a:buChar char="-"/>
-            </a:pPr>
-            <a:r>
-              <a:rPr lang="en-US" sz="1000" dirty="0">
-                <a:latin typeface="Aptos Narrow" panose="020B0004020202020204" pitchFamily="34" charset="0"/>
-              </a:rPr>
-              <a:t>at the mean</a:t>
-            </a:r>
-          </a:p>
-          <a:p>
-            <a:pPr marL="628650" lvl="1" indent="-171450">
-              <a:buFontTx/>
-              <a:buChar char="-"/>
-            </a:pPr>
-            <a:r>
-              <a:rPr lang="en-US" sz="1000" dirty="0">
-                <a:latin typeface="Aptos Narrow" panose="020B0004020202020204" pitchFamily="34" charset="0"/>
-              </a:rPr>
-              <a:t>at representative values</a:t>
-            </a:r>
-          </a:p>
-          <a:p>
-            <a:pPr marL="628650" lvl="1" indent="-171450">
-              <a:buFontTx/>
-              <a:buChar char="-"/>
-            </a:pPr>
-            <a:r>
-              <a:rPr lang="en-US" sz="1000" dirty="0">
-                <a:latin typeface="Aptos Narrow" panose="020B0004020202020204" pitchFamily="34" charset="0"/>
-              </a:rPr>
-              <a:t>…</a:t>
-            </a:r>
-          </a:p>
-          <a:p>
-            <a:pPr marL="171450" indent="-171450">
-              <a:buFontTx/>
-              <a:buChar char="-"/>
-            </a:pPr>
-            <a:r>
-              <a:rPr lang="en-US" sz="1000" dirty="0">
-                <a:latin typeface="Aptos Narrow" panose="020B0004020202020204" pitchFamily="34" charset="0"/>
-              </a:rPr>
-              <a:t>average estimates</a:t>
-            </a:r>
-          </a:p>
-          <a:p>
-            <a:pPr marL="628650" lvl="1" indent="-171450">
-              <a:buFontTx/>
-              <a:buChar char="-"/>
-            </a:pPr>
-            <a:r>
-              <a:rPr lang="en-US" sz="1000" dirty="0">
-                <a:latin typeface="Aptos Narrow" panose="020B0004020202020204" pitchFamily="34" charset="0"/>
-              </a:rPr>
-              <a:t>subgroup averages</a:t>
-            </a:r>
-          </a:p>
-        </p:txBody>
-      </p:sp>
-      <p:sp>
-        <p:nvSpPr>
-          <p:cNvPr id="10" name="Rechteck 9">
-            <a:extLst>
-              <a:ext uri="{FF2B5EF4-FFF2-40B4-BE49-F238E27FC236}">
-                <a16:creationId xmlns:a16="http://schemas.microsoft.com/office/drawing/2014/main" id="{76574F92-94F9-6B1B-0777-A36887BD3D1E}"/>
-              </a:ext>
-            </a:extLst>
-          </p:cNvPr>
-          <p:cNvSpPr/>
-          <p:nvPr/>
-        </p:nvSpPr>
-        <p:spPr>
-          <a:xfrm>
-            <a:off x="1450331" y="7120234"/>
-            <a:ext cx="5743946" cy="1224642"/>
-          </a:xfrm>
-          <a:prstGeom prst="rect">
-            <a:avLst/>
-          </a:prstGeom>
-          <a:solidFill>
-            <a:schemeClr val="bg1"/>
-          </a:solidFill>
-          <a:ln>
-            <a:noFill/>
-          </a:ln>
-        </p:spPr>
-        <p:style>
-          <a:lnRef idx="2">
-            <a:schemeClr val="dk1"/>
-          </a:lnRef>
-          <a:fillRef idx="1">
-            <a:schemeClr val="lt1"/>
-          </a:fillRef>
-          <a:effectRef idx="0">
-            <a:schemeClr val="dk1"/>
-          </a:effectRef>
-          <a:fontRef idx="minor">
-            <a:schemeClr val="dk1"/>
-          </a:fontRef>
-        </p:style>
-        <p:txBody>
-          <a:bodyPr rtlCol="0" anchor="t"/>
-          <a:lstStyle/>
-          <a:p>
-            <a:pPr algn="ctr"/>
-            <a:r>
-              <a:rPr lang="en-US" sz="1400" dirty="0">
-                <a:latin typeface="Aptos Narrow" panose="020B0004020202020204" pitchFamily="34" charset="0"/>
-              </a:rPr>
-              <a:t>Statistical inference</a:t>
-            </a:r>
-          </a:p>
-          <a:p>
-            <a:pPr marL="171450" indent="-171450">
-              <a:buFontTx/>
-              <a:buChar char="-"/>
-            </a:pPr>
-            <a:r>
-              <a:rPr lang="en-US" sz="1000" dirty="0">
-                <a:latin typeface="Aptos Narrow" panose="020B0004020202020204" pitchFamily="34" charset="0"/>
-              </a:rPr>
-              <a:t>Quantify uncertainty (delta method, bootstrap, simulation, Bayesian posterior)</a:t>
-            </a:r>
-          </a:p>
-          <a:p>
-            <a:pPr marL="171450" indent="-171450">
-              <a:buFontTx/>
-              <a:buChar char="-"/>
-            </a:pPr>
-            <a:r>
-              <a:rPr lang="en-US" sz="1000" dirty="0">
-                <a:latin typeface="Aptos Narrow" panose="020B0004020202020204" pitchFamily="34" charset="0"/>
-              </a:rPr>
-              <a:t>Conduct null hypothesis or equivalence tests on coefficients or target quantities</a:t>
-            </a:r>
-          </a:p>
-          <a:p>
-            <a:pPr marL="171450" indent="-171450">
-              <a:buFontTx/>
-              <a:buChar char="-"/>
-            </a:pPr>
-            <a:r>
-              <a:rPr lang="en-US" sz="1000" dirty="0">
-                <a:latin typeface="Aptos Narrow" panose="020B0004020202020204" pitchFamily="34" charset="0"/>
-              </a:rPr>
-              <a:t>Test interactions</a:t>
-            </a:r>
-          </a:p>
-          <a:p>
-            <a:pPr marL="628650" lvl="1" indent="-171450">
-              <a:buFontTx/>
-              <a:buChar char="-"/>
-            </a:pPr>
-            <a:r>
-              <a:rPr lang="en-US" sz="1000" dirty="0">
-                <a:latin typeface="Aptos Narrow" panose="020B0004020202020204" pitchFamily="34" charset="0"/>
-              </a:rPr>
-              <a:t>Is the expected outcome higher in group A than in group B?</a:t>
-            </a:r>
-          </a:p>
-          <a:p>
-            <a:pPr marL="628650" lvl="1" indent="-171450">
-              <a:buFontTx/>
-              <a:buChar char="-"/>
-            </a:pPr>
-            <a:r>
-              <a:rPr lang="en-US" sz="1000" dirty="0">
-                <a:latin typeface="Aptos Narrow" panose="020B0004020202020204" pitchFamily="34" charset="0"/>
-              </a:rPr>
-              <a:t>Is the effect or association stronger for some individuals?</a:t>
-            </a:r>
-          </a:p>
-          <a:p>
-            <a:pPr marL="628650" lvl="1" indent="-171450">
-              <a:buFontTx/>
-              <a:buChar char="-"/>
-            </a:pPr>
-            <a:r>
-              <a:rPr lang="en-US" sz="1000" dirty="0">
-                <a:latin typeface="Aptos Narrow" panose="020B0004020202020204" pitchFamily="34" charset="0"/>
-              </a:rPr>
-              <a:t>…</a:t>
-            </a:r>
-          </a:p>
-          <a:p>
-            <a:pPr marL="171450" indent="-171450">
-              <a:buFontTx/>
-              <a:buChar char="-"/>
-            </a:pPr>
-            <a:endParaRPr lang="en-US" sz="1000" dirty="0">
-              <a:latin typeface="Aptos Narrow" panose="020B0004020202020204" pitchFamily="34" charset="0"/>
-            </a:endParaRPr>
-          </a:p>
-        </p:txBody>
-      </p:sp>
-      <p:sp>
-        <p:nvSpPr>
-          <p:cNvPr id="15" name="Rechteck 14">
-            <a:extLst>
-              <a:ext uri="{FF2B5EF4-FFF2-40B4-BE49-F238E27FC236}">
-                <a16:creationId xmlns:a16="http://schemas.microsoft.com/office/drawing/2014/main" id="{D047653A-6CBA-B49D-F297-9C1458D62B99}"/>
-              </a:ext>
-            </a:extLst>
-          </p:cNvPr>
-          <p:cNvSpPr/>
-          <p:nvPr/>
-        </p:nvSpPr>
-        <p:spPr>
-          <a:xfrm>
-            <a:off x="4596965" y="4440376"/>
-            <a:ext cx="3412329" cy="1787411"/>
-          </a:xfrm>
-          <a:prstGeom prst="rect">
-            <a:avLst/>
-          </a:prstGeom>
-          <a:ln>
-            <a:noFill/>
-          </a:ln>
-        </p:spPr>
-        <p:style>
-          <a:lnRef idx="2">
-            <a:schemeClr val="dk1"/>
-          </a:lnRef>
-          <a:fillRef idx="1">
-            <a:schemeClr val="lt1"/>
-          </a:fillRef>
-          <a:effectRef idx="0">
-            <a:schemeClr val="dk1"/>
-          </a:effectRef>
-          <a:fontRef idx="minor">
-            <a:schemeClr val="dk1"/>
-          </a:fontRef>
-        </p:style>
-        <p:txBody>
-          <a:bodyPr rtlCol="0" anchor="t"/>
-          <a:lstStyle/>
-          <a:p>
-            <a:pPr algn="ctr"/>
-            <a:r>
-              <a:rPr lang="en-US" sz="1400" dirty="0">
-                <a:latin typeface="Aptos Narrow" panose="020B0004020202020204" pitchFamily="34" charset="0"/>
-              </a:rPr>
-              <a:t>Scale and contrast</a:t>
-            </a:r>
-          </a:p>
-          <a:p>
-            <a:r>
-              <a:rPr lang="en-US" sz="1000" dirty="0">
-                <a:latin typeface="Aptos Narrow" panose="020B0004020202020204" pitchFamily="34" charset="0"/>
-              </a:rPr>
-              <a:t>Decide on which scale to calculate target quantities. The available options depend on the model type:</a:t>
-            </a:r>
-          </a:p>
-          <a:p>
-            <a:pPr marL="171450" indent="-171450">
-              <a:buFontTx/>
-              <a:buChar char="-"/>
-            </a:pPr>
-            <a:r>
-              <a:rPr lang="en-US" sz="1000" dirty="0">
-                <a:latin typeface="Aptos Narrow" panose="020B0004020202020204" pitchFamily="34" charset="0"/>
-              </a:rPr>
-              <a:t>link</a:t>
-            </a:r>
-          </a:p>
-          <a:p>
-            <a:pPr marL="171450" indent="-171450">
-              <a:buFontTx/>
-              <a:buChar char="-"/>
-            </a:pPr>
-            <a:r>
-              <a:rPr lang="en-US" sz="1000" dirty="0">
-                <a:latin typeface="Aptos Narrow" panose="020B0004020202020204" pitchFamily="34" charset="0"/>
-              </a:rPr>
-              <a:t>response</a:t>
-            </a:r>
-          </a:p>
-          <a:p>
-            <a:pPr marL="171450" indent="-171450">
-              <a:buFontTx/>
-              <a:buChar char="-"/>
-            </a:pPr>
-            <a:r>
-              <a:rPr lang="en-US" sz="1000" dirty="0">
-                <a:latin typeface="Aptos Narrow" panose="020B0004020202020204" pitchFamily="34" charset="0"/>
-              </a:rPr>
-              <a:t>…</a:t>
-            </a:r>
-          </a:p>
-          <a:p>
-            <a:r>
-              <a:rPr lang="en-US" sz="1000" dirty="0">
-                <a:latin typeface="Aptos Narrow" panose="020B0004020202020204" pitchFamily="34" charset="0"/>
-              </a:rPr>
-              <a:t>For counterfactual comparisons, decide how the predictions are contrasted:</a:t>
-            </a:r>
-          </a:p>
-          <a:p>
-            <a:pPr marL="171450" indent="-171450">
-              <a:buFontTx/>
-              <a:buChar char="-"/>
-            </a:pPr>
-            <a:r>
-              <a:rPr lang="en-US" sz="1000" dirty="0">
-                <a:latin typeface="Aptos Narrow" panose="020B0004020202020204" pitchFamily="34" charset="0"/>
-              </a:rPr>
-              <a:t>difference</a:t>
-            </a:r>
-          </a:p>
-          <a:p>
-            <a:pPr marL="171450" indent="-171450">
-              <a:buFontTx/>
-              <a:buChar char="-"/>
-            </a:pPr>
-            <a:r>
-              <a:rPr lang="en-US" sz="1000" dirty="0">
-                <a:latin typeface="Aptos Narrow" panose="020B0004020202020204" pitchFamily="34" charset="0"/>
-              </a:rPr>
-              <a:t>ratio</a:t>
-            </a:r>
-          </a:p>
-          <a:p>
-            <a:pPr marL="171450" indent="-171450">
-              <a:buFontTx/>
-              <a:buChar char="-"/>
-            </a:pPr>
-            <a:r>
-              <a:rPr lang="en-US" sz="1000" dirty="0">
-                <a:latin typeface="Aptos Narrow" panose="020B0004020202020204" pitchFamily="34" charset="0"/>
-              </a:rPr>
-              <a:t>…</a:t>
-            </a:r>
-          </a:p>
-        </p:txBody>
-      </p:sp>
-      <p:sp>
-        <p:nvSpPr>
-          <p:cNvPr id="20" name="Textfeld 19">
-            <a:extLst>
-              <a:ext uri="{FF2B5EF4-FFF2-40B4-BE49-F238E27FC236}">
-                <a16:creationId xmlns:a16="http://schemas.microsoft.com/office/drawing/2014/main" id="{2874A641-8EFB-346D-BB0C-AB26633EE596}"/>
+                <a16:creationId xmlns:a16="http://schemas.microsoft.com/office/drawing/2014/main" id="{CDDAC82B-B122-94BA-87CF-5C68C8034D9A}"/>
               </a:ext>
             </a:extLst>
           </p:cNvPr>
@@ -4017,8 +4130,8 @@
         </p:nvSpPr>
         <p:spPr>
           <a:xfrm>
-            <a:off x="1100269" y="491843"/>
-            <a:ext cx="2674374" cy="307777"/>
+            <a:off x="10188561" y="7392987"/>
+            <a:ext cx="3046554" cy="1384995"/>
           </a:xfrm>
           <a:prstGeom prst="rect">
             <a:avLst/>
@@ -4032,568 +4145,32 @@
           <a:lstStyle/>
           <a:p>
             <a:r>
-              <a:rPr lang="en-US" sz="1400" dirty="0">
+              <a:rPr lang="en-US" sz="2800" dirty="0">
                 <a:solidFill>
-                  <a:srgbClr val="E69F00"/>
+                  <a:schemeClr val="bg1">
+                    <a:lumMod val="65000"/>
+                  </a:schemeClr>
                 </a:solidFill>
-                <a:latin typeface="Aptos Narrow" panose="020B0004020202020204" pitchFamily="34" charset="0"/>
+                <a:latin typeface="EB Garamond Medium" pitchFamily="2" charset="0"/>
+                <a:ea typeface="EB Garamond Medium" pitchFamily="2" charset="0"/>
+                <a:cs typeface="EB Garamond Medium" pitchFamily="2" charset="0"/>
               </a:rPr>
-              <a:t>Building the prediction machine</a:t>
-            </a:r>
-          </a:p>
-        </p:txBody>
-      </p:sp>
-      <p:sp>
-        <p:nvSpPr>
-          <p:cNvPr id="21" name="Textfeld 20">
-            <a:extLst>
-              <a:ext uri="{FF2B5EF4-FFF2-40B4-BE49-F238E27FC236}">
-                <a16:creationId xmlns:a16="http://schemas.microsoft.com/office/drawing/2014/main" id="{3FB7266C-F358-C294-52D1-532855E61251}"/>
-              </a:ext>
-            </a:extLst>
-          </p:cNvPr>
-          <p:cNvSpPr txBox="1"/>
-          <p:nvPr/>
-        </p:nvSpPr>
-        <p:spPr>
-          <a:xfrm>
-            <a:off x="4278165" y="485171"/>
-            <a:ext cx="3313468" cy="307777"/>
-          </a:xfrm>
-          <a:prstGeom prst="rect">
-            <a:avLst/>
-          </a:prstGeom>
-          <a:noFill/>
-        </p:spPr>
-        <p:txBody>
-          <a:bodyPr wrap="square" rtlCol="0">
-            <a:spAutoFit/>
-          </a:bodyPr>
-          <a:lstStyle/>
-          <a:p>
-            <a:r>
-              <a:rPr lang="en-US" sz="1400" dirty="0">
+              <a:t>Standard workflow:</a:t>
+            </a:r>
+          </a:p>
+          <a:p>
+            <a:r>
+              <a:rPr lang="en-US" sz="2800" dirty="0">
                 <a:solidFill>
-                  <a:srgbClr val="CC79A7"/>
+                  <a:schemeClr val="bg1">
+                    <a:lumMod val="65000"/>
+                  </a:schemeClr>
                 </a:solidFill>
-                <a:latin typeface="Aptos Narrow" panose="020B0004020202020204" pitchFamily="34" charset="0"/>
+                <a:latin typeface="EB Garamond Medium" pitchFamily="2" charset="0"/>
+                <a:ea typeface="EB Garamond Medium" pitchFamily="2" charset="0"/>
+                <a:cs typeface="EB Garamond Medium" pitchFamily="2" charset="0"/>
               </a:rPr>
-              <a:t>Querying the prediction machine</a:t>
-            </a:r>
-          </a:p>
-        </p:txBody>
-      </p:sp>
-      <p:sp>
-        <p:nvSpPr>
-          <p:cNvPr id="22" name="Pfeil nach unten 21">
-            <a:extLst>
-              <a:ext uri="{FF2B5EF4-FFF2-40B4-BE49-F238E27FC236}">
-                <a16:creationId xmlns:a16="http://schemas.microsoft.com/office/drawing/2014/main" id="{FD791441-EADF-AA30-9F0C-8BB5C1DF6AC4}"/>
-              </a:ext>
-            </a:extLst>
-          </p:cNvPr>
-          <p:cNvSpPr/>
-          <p:nvPr/>
-        </p:nvSpPr>
-        <p:spPr>
-          <a:xfrm>
-            <a:off x="2225793" y="2564800"/>
-            <a:ext cx="471948" cy="893508"/>
-          </a:xfrm>
-          <a:prstGeom prst="downArrow">
-            <a:avLst/>
-          </a:prstGeom>
-          <a:solidFill>
-            <a:schemeClr val="bg2">
-              <a:lumMod val="90000"/>
-            </a:schemeClr>
-          </a:solidFill>
-          <a:ln>
-            <a:noFill/>
-          </a:ln>
-        </p:spPr>
-        <p:style>
-          <a:lnRef idx="2">
-            <a:schemeClr val="accent1">
-              <a:shade val="15000"/>
-            </a:schemeClr>
-          </a:lnRef>
-          <a:fillRef idx="1">
-            <a:schemeClr val="accent1"/>
-          </a:fillRef>
-          <a:effectRef idx="0">
-            <a:schemeClr val="accent1"/>
-          </a:effectRef>
-          <a:fontRef idx="minor">
-            <a:schemeClr val="lt1"/>
-          </a:fontRef>
-        </p:style>
-        <p:txBody>
-          <a:bodyPr rtlCol="0" anchor="ctr"/>
-          <a:lstStyle/>
-          <a:p>
-            <a:pPr algn="ctr"/>
-            <a:endParaRPr lang="en-US">
-              <a:latin typeface="Aptos Narrow" panose="020B0004020202020204" pitchFamily="34" charset="0"/>
-            </a:endParaRPr>
-          </a:p>
-        </p:txBody>
-      </p:sp>
-      <p:sp>
-        <p:nvSpPr>
-          <p:cNvPr id="26" name="Pfeil nach unten 25">
-            <a:extLst>
-              <a:ext uri="{FF2B5EF4-FFF2-40B4-BE49-F238E27FC236}">
-                <a16:creationId xmlns:a16="http://schemas.microsoft.com/office/drawing/2014/main" id="{5AEE3674-DE6B-65FE-FD29-5DBF55A84D0B}"/>
-              </a:ext>
-            </a:extLst>
-          </p:cNvPr>
-          <p:cNvSpPr/>
-          <p:nvPr/>
-        </p:nvSpPr>
-        <p:spPr>
-          <a:xfrm>
-            <a:off x="5170403" y="2257437"/>
-            <a:ext cx="471948" cy="317650"/>
-          </a:xfrm>
-          <a:prstGeom prst="downArrow">
-            <a:avLst/>
-          </a:prstGeom>
-          <a:solidFill>
-            <a:schemeClr val="bg2">
-              <a:lumMod val="90000"/>
-            </a:schemeClr>
-          </a:solidFill>
-          <a:ln>
-            <a:noFill/>
-          </a:ln>
-        </p:spPr>
-        <p:style>
-          <a:lnRef idx="2">
-            <a:schemeClr val="accent1">
-              <a:shade val="15000"/>
-            </a:schemeClr>
-          </a:lnRef>
-          <a:fillRef idx="1">
-            <a:schemeClr val="accent1"/>
-          </a:fillRef>
-          <a:effectRef idx="0">
-            <a:schemeClr val="accent1"/>
-          </a:effectRef>
-          <a:fontRef idx="minor">
-            <a:schemeClr val="lt1"/>
-          </a:fontRef>
-        </p:style>
-        <p:txBody>
-          <a:bodyPr rtlCol="0" anchor="ctr"/>
-          <a:lstStyle/>
-          <a:p>
-            <a:pPr algn="ctr"/>
-            <a:endParaRPr lang="en-US">
-              <a:latin typeface="Aptos Narrow" panose="020B0004020202020204" pitchFamily="34" charset="0"/>
-            </a:endParaRPr>
-          </a:p>
-        </p:txBody>
-      </p:sp>
-      <p:sp>
-        <p:nvSpPr>
-          <p:cNvPr id="27" name="Pfeil nach unten 26">
-            <a:extLst>
-              <a:ext uri="{FF2B5EF4-FFF2-40B4-BE49-F238E27FC236}">
-                <a16:creationId xmlns:a16="http://schemas.microsoft.com/office/drawing/2014/main" id="{FA0FA04C-7E3A-D4BA-3E37-CA3F36F85688}"/>
-              </a:ext>
-            </a:extLst>
-          </p:cNvPr>
-          <p:cNvSpPr/>
-          <p:nvPr/>
-        </p:nvSpPr>
-        <p:spPr>
-          <a:xfrm>
-            <a:off x="7035487" y="2254336"/>
-            <a:ext cx="471948" cy="309029"/>
-          </a:xfrm>
-          <a:prstGeom prst="downArrow">
-            <a:avLst/>
-          </a:prstGeom>
-          <a:solidFill>
-            <a:schemeClr val="bg2">
-              <a:lumMod val="90000"/>
-            </a:schemeClr>
-          </a:solidFill>
-          <a:ln>
-            <a:noFill/>
-          </a:ln>
-        </p:spPr>
-        <p:style>
-          <a:lnRef idx="2">
-            <a:schemeClr val="accent1">
-              <a:shade val="15000"/>
-            </a:schemeClr>
-          </a:lnRef>
-          <a:fillRef idx="1">
-            <a:schemeClr val="accent1"/>
-          </a:fillRef>
-          <a:effectRef idx="0">
-            <a:schemeClr val="accent1"/>
-          </a:effectRef>
-          <a:fontRef idx="minor">
-            <a:schemeClr val="lt1"/>
-          </a:fontRef>
-        </p:style>
-        <p:txBody>
-          <a:bodyPr rtlCol="0" anchor="ctr"/>
-          <a:lstStyle/>
-          <a:p>
-            <a:pPr algn="ctr"/>
-            <a:endParaRPr lang="en-US">
-              <a:latin typeface="Aptos Narrow" panose="020B0004020202020204" pitchFamily="34" charset="0"/>
-            </a:endParaRPr>
-          </a:p>
-        </p:txBody>
-      </p:sp>
-      <p:sp>
-        <p:nvSpPr>
-          <p:cNvPr id="28" name="Pfeil nach unten 27">
-            <a:extLst>
-              <a:ext uri="{FF2B5EF4-FFF2-40B4-BE49-F238E27FC236}">
-                <a16:creationId xmlns:a16="http://schemas.microsoft.com/office/drawing/2014/main" id="{BE5E73E9-3F8C-EE77-421A-FAF445D84AD6}"/>
-              </a:ext>
-            </a:extLst>
-          </p:cNvPr>
-          <p:cNvSpPr/>
-          <p:nvPr/>
-        </p:nvSpPr>
-        <p:spPr>
-          <a:xfrm>
-            <a:off x="6066520" y="4157387"/>
-            <a:ext cx="471948" cy="287171"/>
-          </a:xfrm>
-          <a:prstGeom prst="downArrow">
-            <a:avLst/>
-          </a:prstGeom>
-          <a:solidFill>
-            <a:schemeClr val="bg2">
-              <a:lumMod val="90000"/>
-            </a:schemeClr>
-          </a:solidFill>
-          <a:ln>
-            <a:noFill/>
-          </a:ln>
-        </p:spPr>
-        <p:style>
-          <a:lnRef idx="2">
-            <a:schemeClr val="accent1">
-              <a:shade val="15000"/>
-            </a:schemeClr>
-          </a:lnRef>
-          <a:fillRef idx="1">
-            <a:schemeClr val="accent1"/>
-          </a:fillRef>
-          <a:effectRef idx="0">
-            <a:schemeClr val="accent1"/>
-          </a:effectRef>
-          <a:fontRef idx="minor">
-            <a:schemeClr val="lt1"/>
-          </a:fontRef>
-        </p:style>
-        <p:txBody>
-          <a:bodyPr rtlCol="0" anchor="ctr"/>
-          <a:lstStyle/>
-          <a:p>
-            <a:pPr algn="ctr"/>
-            <a:endParaRPr lang="en-US">
-              <a:latin typeface="Aptos Narrow" panose="020B0004020202020204" pitchFamily="34" charset="0"/>
-            </a:endParaRPr>
-          </a:p>
-        </p:txBody>
-      </p:sp>
-      <p:sp>
-        <p:nvSpPr>
-          <p:cNvPr id="30" name="Pfeil nach unten 29">
-            <a:extLst>
-              <a:ext uri="{FF2B5EF4-FFF2-40B4-BE49-F238E27FC236}">
-                <a16:creationId xmlns:a16="http://schemas.microsoft.com/office/drawing/2014/main" id="{794D69B6-C8F1-9104-711D-A82480102784}"/>
-              </a:ext>
-            </a:extLst>
-          </p:cNvPr>
-          <p:cNvSpPr/>
-          <p:nvPr/>
-        </p:nvSpPr>
-        <p:spPr>
-          <a:xfrm>
-            <a:off x="6066520" y="6227788"/>
-            <a:ext cx="471948" cy="805325"/>
-          </a:xfrm>
-          <a:prstGeom prst="downArrow">
-            <a:avLst/>
-          </a:prstGeom>
-          <a:solidFill>
-            <a:schemeClr val="bg2">
-              <a:lumMod val="90000"/>
-            </a:schemeClr>
-          </a:solidFill>
-          <a:ln>
-            <a:noFill/>
-          </a:ln>
-        </p:spPr>
-        <p:style>
-          <a:lnRef idx="2">
-            <a:schemeClr val="accent1">
-              <a:shade val="15000"/>
-            </a:schemeClr>
-          </a:lnRef>
-          <a:fillRef idx="1">
-            <a:schemeClr val="accent1"/>
-          </a:fillRef>
-          <a:effectRef idx="0">
-            <a:schemeClr val="accent1"/>
-          </a:effectRef>
-          <a:fontRef idx="minor">
-            <a:schemeClr val="lt1"/>
-          </a:fontRef>
-        </p:style>
-        <p:txBody>
-          <a:bodyPr rtlCol="0" anchor="ctr"/>
-          <a:lstStyle/>
-          <a:p>
-            <a:pPr algn="ctr"/>
-            <a:endParaRPr lang="en-US">
-              <a:latin typeface="Aptos Narrow" panose="020B0004020202020204" pitchFamily="34" charset="0"/>
-            </a:endParaRPr>
-          </a:p>
-        </p:txBody>
-      </p:sp>
-      <p:sp>
-        <p:nvSpPr>
-          <p:cNvPr id="2" name="Textfeld 1">
-            <a:extLst>
-              <a:ext uri="{FF2B5EF4-FFF2-40B4-BE49-F238E27FC236}">
-                <a16:creationId xmlns:a16="http://schemas.microsoft.com/office/drawing/2014/main" id="{A1230AF6-196F-852B-16D7-8990D25D3084}"/>
-              </a:ext>
-            </a:extLst>
-          </p:cNvPr>
-          <p:cNvSpPr txBox="1"/>
-          <p:nvPr/>
-        </p:nvSpPr>
-        <p:spPr>
-          <a:xfrm>
-            <a:off x="1217493" y="6384162"/>
-            <a:ext cx="1905848" cy="307777"/>
-          </a:xfrm>
-          <a:prstGeom prst="rect">
-            <a:avLst/>
-          </a:prstGeom>
-          <a:noFill/>
-        </p:spPr>
-        <p:txBody>
-          <a:bodyPr wrap="square" rtlCol="0">
-            <a:spAutoFit/>
-          </a:bodyPr>
-          <a:lstStyle/>
-          <a:p>
-            <a:r>
-              <a:rPr lang="en-US" sz="1400" dirty="0">
-                <a:solidFill>
-                  <a:srgbClr val="D55E00"/>
-                </a:solidFill>
-                <a:latin typeface="Aptos Narrow" panose="020B0004020202020204" pitchFamily="34" charset="0"/>
-              </a:rPr>
-              <a:t>Testing the results</a:t>
-            </a:r>
-          </a:p>
-        </p:txBody>
-      </p:sp>
-      <p:sp>
-        <p:nvSpPr>
-          <p:cNvPr id="13" name="Pfeil nach unten 12">
-            <a:extLst>
-              <a:ext uri="{FF2B5EF4-FFF2-40B4-BE49-F238E27FC236}">
-                <a16:creationId xmlns:a16="http://schemas.microsoft.com/office/drawing/2014/main" id="{3CE795CE-EAEB-364E-616B-E7BC4FF8DD0E}"/>
-              </a:ext>
-            </a:extLst>
-          </p:cNvPr>
-          <p:cNvSpPr/>
-          <p:nvPr/>
-        </p:nvSpPr>
-        <p:spPr>
-          <a:xfrm rot="16200000">
-            <a:off x="3872247" y="869460"/>
-            <a:ext cx="471948" cy="518473"/>
-          </a:xfrm>
-          <a:prstGeom prst="downArrow">
-            <a:avLst/>
-          </a:prstGeom>
-          <a:solidFill>
-            <a:schemeClr val="bg1">
-              <a:lumMod val="85000"/>
-            </a:schemeClr>
-          </a:solidFill>
-          <a:ln>
-            <a:noFill/>
-          </a:ln>
-        </p:spPr>
-        <p:style>
-          <a:lnRef idx="2">
-            <a:schemeClr val="accent1">
-              <a:shade val="15000"/>
-            </a:schemeClr>
-          </a:lnRef>
-          <a:fillRef idx="1">
-            <a:schemeClr val="accent1"/>
-          </a:fillRef>
-          <a:effectRef idx="0">
-            <a:schemeClr val="accent1"/>
-          </a:effectRef>
-          <a:fontRef idx="minor">
-            <a:schemeClr val="lt1"/>
-          </a:fontRef>
-        </p:style>
-        <p:txBody>
-          <a:bodyPr rtlCol="0" anchor="ctr"/>
-          <a:lstStyle/>
-          <a:p>
-            <a:pPr algn="ctr"/>
-            <a:endParaRPr lang="en-US">
-              <a:latin typeface="Aptos Narrow" panose="020B0004020202020204" pitchFamily="34" charset="0"/>
-            </a:endParaRPr>
-          </a:p>
-        </p:txBody>
-      </p:sp>
-      <p:sp>
-        <p:nvSpPr>
-          <p:cNvPr id="14" name="Textfeld 13">
-            <a:extLst>
-              <a:ext uri="{FF2B5EF4-FFF2-40B4-BE49-F238E27FC236}">
-                <a16:creationId xmlns:a16="http://schemas.microsoft.com/office/drawing/2014/main" id="{D559ACF5-2662-BC5A-937B-78F607FEE8D8}"/>
-              </a:ext>
-            </a:extLst>
-          </p:cNvPr>
-          <p:cNvSpPr txBox="1"/>
-          <p:nvPr/>
-        </p:nvSpPr>
-        <p:spPr>
-          <a:xfrm>
-            <a:off x="1280271" y="4584858"/>
-            <a:ext cx="2187343" cy="400110"/>
-          </a:xfrm>
-          <a:prstGeom prst="rect">
-            <a:avLst/>
-          </a:prstGeom>
-          <a:noFill/>
-        </p:spPr>
-        <p:txBody>
-          <a:bodyPr wrap="square" rtlCol="0">
-            <a:spAutoFit/>
-          </a:bodyPr>
-          <a:lstStyle/>
-          <a:p>
-            <a:r>
-              <a:rPr lang="en-US" sz="1000" i="1" dirty="0">
-                <a:latin typeface="Aptos Narrow" panose="020B0004020202020204" pitchFamily="34" charset="0"/>
-              </a:rPr>
-              <a:t>In the “standard” workflow, we study the estimated coefficients directly.</a:t>
-            </a:r>
-          </a:p>
-        </p:txBody>
-      </p:sp>
-      <p:sp>
-        <p:nvSpPr>
-          <p:cNvPr id="24" name="Nach oben gebogener Pfeil 23">
-            <a:extLst>
-              <a:ext uri="{FF2B5EF4-FFF2-40B4-BE49-F238E27FC236}">
-                <a16:creationId xmlns:a16="http://schemas.microsoft.com/office/drawing/2014/main" id="{50B74537-D8E9-96F8-2744-050254452DD1}"/>
-              </a:ext>
-            </a:extLst>
-          </p:cNvPr>
-          <p:cNvSpPr/>
-          <p:nvPr/>
-        </p:nvSpPr>
-        <p:spPr>
-          <a:xfrm>
-            <a:off x="3610557" y="1038257"/>
-            <a:ext cx="375111" cy="4845707"/>
-          </a:xfrm>
-          <a:prstGeom prst="bentUpArrow">
-            <a:avLst>
-              <a:gd name="adj1" fmla="val 50000"/>
-              <a:gd name="adj2" fmla="val 12440"/>
-              <a:gd name="adj3" fmla="val 0"/>
-            </a:avLst>
-          </a:prstGeom>
-          <a:solidFill>
-            <a:schemeClr val="bg1">
-              <a:lumMod val="85000"/>
-            </a:schemeClr>
-          </a:solidFill>
-          <a:ln>
-            <a:noFill/>
-          </a:ln>
-        </p:spPr>
-        <p:style>
-          <a:lnRef idx="2">
-            <a:schemeClr val="accent1">
-              <a:shade val="15000"/>
-            </a:schemeClr>
-          </a:lnRef>
-          <a:fillRef idx="1">
-            <a:schemeClr val="accent1"/>
-          </a:fillRef>
-          <a:effectRef idx="0">
-            <a:schemeClr val="accent1"/>
-          </a:effectRef>
-          <a:fontRef idx="minor">
-            <a:schemeClr val="lt1"/>
-          </a:fontRef>
-        </p:style>
-        <p:txBody>
-          <a:bodyPr rtlCol="0" anchor="ctr"/>
-          <a:lstStyle/>
-          <a:p>
-            <a:pPr algn="ctr"/>
-            <a:endParaRPr lang="en-US"/>
-          </a:p>
-        </p:txBody>
-      </p:sp>
-      <p:sp>
-        <p:nvSpPr>
-          <p:cNvPr id="25" name="Textfeld 24">
-            <a:extLst>
-              <a:ext uri="{FF2B5EF4-FFF2-40B4-BE49-F238E27FC236}">
-                <a16:creationId xmlns:a16="http://schemas.microsoft.com/office/drawing/2014/main" id="{5CC5DBBB-84CE-59AB-4B14-43C00D390583}"/>
-              </a:ext>
-            </a:extLst>
-          </p:cNvPr>
-          <p:cNvSpPr txBox="1"/>
-          <p:nvPr/>
-        </p:nvSpPr>
-        <p:spPr>
-          <a:xfrm>
-            <a:off x="1717431" y="5370593"/>
-            <a:ext cx="1893126" cy="707886"/>
-          </a:xfrm>
-          <a:prstGeom prst="rect">
-            <a:avLst/>
-          </a:prstGeom>
-          <a:noFill/>
-        </p:spPr>
-        <p:txBody>
-          <a:bodyPr wrap="square" rtlCol="0">
-            <a:spAutoFit/>
-          </a:bodyPr>
-          <a:lstStyle/>
-          <a:p>
-            <a:pPr algn="r"/>
-            <a:endParaRPr lang="en-US" sz="1000" i="1" dirty="0">
-              <a:latin typeface="Aptos Narrow" panose="020B0004020202020204" pitchFamily="34" charset="0"/>
-            </a:endParaRPr>
-          </a:p>
-          <a:p>
-            <a:pPr algn="r"/>
-            <a:r>
-              <a:rPr lang="en-US" sz="1000" i="1" dirty="0">
-                <a:latin typeface="Aptos Narrow" panose="020B0004020202020204" pitchFamily="34" charset="0"/>
-              </a:rPr>
-              <a:t>In the “prediction machines” workflow, we use the coefficients to compute target quantities.</a:t>
+              <a:t>Coefficients are studied directly</a:t>
             </a:r>
           </a:p>
         </p:txBody>
@@ -4870,4 +4447,299 @@
     </a:ext>
   </a:extLst>
 </a:theme>
+</file>
+
+<file path=ppt/theme/theme2.xml><?xml version="1.0" encoding="utf-8"?>
+<a:theme xmlns:a="http://schemas.openxmlformats.org/drawingml/2006/main" name="Office">
+  <a:themeElements>
+    <a:clrScheme name="Office">
+      <a:dk1>
+        <a:sysClr val="windowText" lastClr="000000"/>
+      </a:dk1>
+      <a:lt1>
+        <a:sysClr val="window" lastClr="FFFFFF"/>
+      </a:lt1>
+      <a:dk2>
+        <a:srgbClr val="44546A"/>
+      </a:dk2>
+      <a:lt2>
+        <a:srgbClr val="E7E6E6"/>
+      </a:lt2>
+      <a:accent1>
+        <a:srgbClr val="4472C4"/>
+      </a:accent1>
+      <a:accent2>
+        <a:srgbClr val="ED7D31"/>
+      </a:accent2>
+      <a:accent3>
+        <a:srgbClr val="A5A5A5"/>
+      </a:accent3>
+      <a:accent4>
+        <a:srgbClr val="FFC000"/>
+      </a:accent4>
+      <a:accent5>
+        <a:srgbClr val="5B9BD5"/>
+      </a:accent5>
+      <a:accent6>
+        <a:srgbClr val="70AD47"/>
+      </a:accent6>
+      <a:hlink>
+        <a:srgbClr val="0563C1"/>
+      </a:hlink>
+      <a:folHlink>
+        <a:srgbClr val="954F72"/>
+      </a:folHlink>
+    </a:clrScheme>
+    <a:fontScheme name="Office">
+      <a:majorFont>
+        <a:latin typeface="Calibri Light" panose="020F0302020204030204"/>
+        <a:ea typeface=""/>
+        <a:cs typeface=""/>
+        <a:font script="Jpan" typeface="游ゴシック Light"/>
+        <a:font script="Hang" typeface="맑은 고딕"/>
+        <a:font script="Hans" typeface="等线 Light"/>
+        <a:font script="Hant" typeface="新細明體"/>
+        <a:font script="Arab" typeface="Times New Roman"/>
+        <a:font script="Hebr" typeface="Times New Roman"/>
+        <a:font script="Thai" typeface="Angsana New"/>
+        <a:font script="Ethi" typeface="Nyala"/>
+        <a:font script="Beng" typeface="Vrinda"/>
+        <a:font script="Gujr" typeface="Shruti"/>
+        <a:font script="Khmr" typeface="MoolBoran"/>
+        <a:font script="Knda" typeface="Tunga"/>
+        <a:font script="Guru" typeface="Raavi"/>
+        <a:font script="Cans" typeface="Euphemia"/>
+        <a:font script="Cher" typeface="Plantagenet Cherokee"/>
+        <a:font script="Yiii" typeface="Microsoft Yi Baiti"/>
+        <a:font script="Tibt" typeface="Microsoft Himalaya"/>
+        <a:font script="Thaa" typeface="MV Boli"/>
+        <a:font script="Deva" typeface="Mangal"/>
+        <a:font script="Telu" typeface="Gautami"/>
+        <a:font script="Taml" typeface="Latha"/>
+        <a:font script="Syrc" typeface="Estrangelo Edessa"/>
+        <a:font script="Orya" typeface="Kalinga"/>
+        <a:font script="Mlym" typeface="Kartika"/>
+        <a:font script="Laoo" typeface="DokChampa"/>
+        <a:font script="Sinh" typeface="Iskoola Pota"/>
+        <a:font script="Mong" typeface="Mongolian Baiti"/>
+        <a:font script="Viet" typeface="Times New Roman"/>
+        <a:font script="Uigh" typeface="Microsoft Uighur"/>
+        <a:font script="Geor" typeface="Sylfaen"/>
+        <a:font script="Armn" typeface="Arial"/>
+        <a:font script="Bugi" typeface="Leelawadee UI"/>
+        <a:font script="Bopo" typeface="Microsoft JhengHei"/>
+        <a:font script="Java" typeface="Javanese Text"/>
+        <a:font script="Lisu" typeface="Segoe UI"/>
+        <a:font script="Mymr" typeface="Myanmar Text"/>
+        <a:font script="Nkoo" typeface="Ebrima"/>
+        <a:font script="Olck" typeface="Nirmala UI"/>
+        <a:font script="Osma" typeface="Ebrima"/>
+        <a:font script="Phag" typeface="Phagspa"/>
+        <a:font script="Syrn" typeface="Estrangelo Edessa"/>
+        <a:font script="Syrj" typeface="Estrangelo Edessa"/>
+        <a:font script="Syre" typeface="Estrangelo Edessa"/>
+        <a:font script="Sora" typeface="Nirmala UI"/>
+        <a:font script="Tale" typeface="Microsoft Tai Le"/>
+        <a:font script="Talu" typeface="Microsoft New Tai Lue"/>
+        <a:font script="Tfng" typeface="Ebrima"/>
+      </a:majorFont>
+      <a:minorFont>
+        <a:latin typeface="Calibri" panose="020F0502020204030204"/>
+        <a:ea typeface=""/>
+        <a:cs typeface=""/>
+        <a:font script="Jpan" typeface="游ゴシック"/>
+        <a:font script="Hang" typeface="맑은 고딕"/>
+        <a:font script="Hans" typeface="等线"/>
+        <a:font script="Hant" typeface="新細明體"/>
+        <a:font script="Arab" typeface="Arial"/>
+        <a:font script="Hebr" typeface="Arial"/>
+        <a:font script="Thai" typeface="Cordia New"/>
+        <a:font script="Ethi" typeface="Nyala"/>
+        <a:font script="Beng" typeface="Vrinda"/>
+        <a:font script="Gujr" typeface="Shruti"/>
+        <a:font script="Khmr" typeface="DaunPenh"/>
+        <a:font script="Knda" typeface="Tunga"/>
+        <a:font script="Guru" typeface="Raavi"/>
+        <a:font script="Cans" typeface="Euphemia"/>
+        <a:font script="Cher" typeface="Plantagenet Cherokee"/>
+        <a:font script="Yiii" typeface="Microsoft Yi Baiti"/>
+        <a:font script="Tibt" typeface="Microsoft Himalaya"/>
+        <a:font script="Thaa" typeface="MV Boli"/>
+        <a:font script="Deva" typeface="Mangal"/>
+        <a:font script="Telu" typeface="Gautami"/>
+        <a:font script="Taml" typeface="Latha"/>
+        <a:font script="Syrc" typeface="Estrangelo Edessa"/>
+        <a:font script="Orya" typeface="Kalinga"/>
+        <a:font script="Mlym" typeface="Kartika"/>
+        <a:font script="Laoo" typeface="DokChampa"/>
+        <a:font script="Sinh" typeface="Iskoola Pota"/>
+        <a:font script="Mong" typeface="Mongolian Baiti"/>
+        <a:font script="Viet" typeface="Arial"/>
+        <a:font script="Uigh" typeface="Microsoft Uighur"/>
+        <a:font script="Geor" typeface="Sylfaen"/>
+        <a:font script="Armn" typeface="Arial"/>
+        <a:font script="Bugi" typeface="Leelawadee UI"/>
+        <a:font script="Bopo" typeface="Microsoft JhengHei"/>
+        <a:font script="Java" typeface="Javanese Text"/>
+        <a:font script="Lisu" typeface="Segoe UI"/>
+        <a:font script="Mymr" typeface="Myanmar Text"/>
+        <a:font script="Nkoo" typeface="Ebrima"/>
+        <a:font script="Olck" typeface="Nirmala UI"/>
+        <a:font script="Osma" typeface="Ebrima"/>
+        <a:font script="Phag" typeface="Phagspa"/>
+        <a:font script="Syrn" typeface="Estrangelo Edessa"/>
+        <a:font script="Syrj" typeface="Estrangelo Edessa"/>
+        <a:font script="Syre" typeface="Estrangelo Edessa"/>
+        <a:font script="Sora" typeface="Nirmala UI"/>
+        <a:font script="Tale" typeface="Microsoft Tai Le"/>
+        <a:font script="Talu" typeface="Microsoft New Tai Lue"/>
+        <a:font script="Tfng" typeface="Ebrima"/>
+      </a:minorFont>
+    </a:fontScheme>
+    <a:fmtScheme name="Office">
+      <a:fillStyleLst>
+        <a:solidFill>
+          <a:schemeClr val="phClr"/>
+        </a:solidFill>
+        <a:gradFill rotWithShape="1">
+          <a:gsLst>
+            <a:gs pos="0">
+              <a:schemeClr val="phClr">
+                <a:lumMod val="110000"/>
+                <a:satMod val="105000"/>
+                <a:tint val="67000"/>
+              </a:schemeClr>
+            </a:gs>
+            <a:gs pos="50000">
+              <a:schemeClr val="phClr">
+                <a:lumMod val="105000"/>
+                <a:satMod val="103000"/>
+                <a:tint val="73000"/>
+              </a:schemeClr>
+            </a:gs>
+            <a:gs pos="100000">
+              <a:schemeClr val="phClr">
+                <a:lumMod val="105000"/>
+                <a:satMod val="109000"/>
+                <a:tint val="81000"/>
+              </a:schemeClr>
+            </a:gs>
+          </a:gsLst>
+          <a:lin ang="5400000" scaled="0"/>
+        </a:gradFill>
+        <a:gradFill rotWithShape="1">
+          <a:gsLst>
+            <a:gs pos="0">
+              <a:schemeClr val="phClr">
+                <a:satMod val="103000"/>
+                <a:lumMod val="102000"/>
+                <a:tint val="94000"/>
+              </a:schemeClr>
+            </a:gs>
+            <a:gs pos="50000">
+              <a:schemeClr val="phClr">
+                <a:satMod val="110000"/>
+                <a:lumMod val="100000"/>
+                <a:shade val="100000"/>
+              </a:schemeClr>
+            </a:gs>
+            <a:gs pos="100000">
+              <a:schemeClr val="phClr">
+                <a:lumMod val="99000"/>
+                <a:satMod val="120000"/>
+                <a:shade val="78000"/>
+              </a:schemeClr>
+            </a:gs>
+          </a:gsLst>
+          <a:lin ang="5400000" scaled="0"/>
+        </a:gradFill>
+      </a:fillStyleLst>
+      <a:lnStyleLst>
+        <a:ln w="6350" cap="flat" cmpd="sng" algn="ctr">
+          <a:solidFill>
+            <a:schemeClr val="phClr"/>
+          </a:solidFill>
+          <a:prstDash val="solid"/>
+          <a:miter lim="800000"/>
+        </a:ln>
+        <a:ln w="12700" cap="flat" cmpd="sng" algn="ctr">
+          <a:solidFill>
+            <a:schemeClr val="phClr"/>
+          </a:solidFill>
+          <a:prstDash val="solid"/>
+          <a:miter lim="800000"/>
+        </a:ln>
+        <a:ln w="19050" cap="flat" cmpd="sng" algn="ctr">
+          <a:solidFill>
+            <a:schemeClr val="phClr"/>
+          </a:solidFill>
+          <a:prstDash val="solid"/>
+          <a:miter lim="800000"/>
+        </a:ln>
+      </a:lnStyleLst>
+      <a:effectStyleLst>
+        <a:effectStyle>
+          <a:effectLst/>
+        </a:effectStyle>
+        <a:effectStyle>
+          <a:effectLst/>
+        </a:effectStyle>
+        <a:effectStyle>
+          <a:effectLst>
+            <a:outerShdw blurRad="57150" dist="19050" dir="5400000" algn="ctr" rotWithShape="0">
+              <a:srgbClr val="000000">
+                <a:alpha val="63000"/>
+              </a:srgbClr>
+            </a:outerShdw>
+          </a:effectLst>
+        </a:effectStyle>
+      </a:effectStyleLst>
+      <a:bgFillStyleLst>
+        <a:solidFill>
+          <a:schemeClr val="phClr"/>
+        </a:solidFill>
+        <a:solidFill>
+          <a:schemeClr val="phClr">
+            <a:tint val="95000"/>
+            <a:satMod val="170000"/>
+          </a:schemeClr>
+        </a:solidFill>
+        <a:gradFill rotWithShape="1">
+          <a:gsLst>
+            <a:gs pos="0">
+              <a:schemeClr val="phClr">
+                <a:tint val="93000"/>
+                <a:satMod val="150000"/>
+                <a:shade val="98000"/>
+                <a:lumMod val="102000"/>
+              </a:schemeClr>
+            </a:gs>
+            <a:gs pos="50000">
+              <a:schemeClr val="phClr">
+                <a:tint val="98000"/>
+                <a:satMod val="130000"/>
+                <a:shade val="90000"/>
+                <a:lumMod val="103000"/>
+              </a:schemeClr>
+            </a:gs>
+            <a:gs pos="100000">
+              <a:schemeClr val="phClr">
+                <a:shade val="63000"/>
+                <a:satMod val="120000"/>
+              </a:schemeClr>
+            </a:gs>
+          </a:gsLst>
+          <a:lin ang="5400000" scaled="0"/>
+        </a:gradFill>
+      </a:bgFillStyleLst>
+    </a:fmtScheme>
+  </a:themeElements>
+  <a:objectDefaults/>
+  <a:extraClrSchemeLst/>
+  <a:extLst>
+    <a:ext uri="{05A4C25C-085E-4340-85A3-A5531E510DB2}">
+      <thm15:themeFamily xmlns:thm15="http://schemas.microsoft.com/office/thememl/2012/main" name="Office Theme" id="{62F939B6-93AF-4DB8-9C6B-D6C7DFDC589F}" vid="{4A3C46E8-61CC-4603-A589-7422A47A8E4A}"/>
+    </a:ext>
+  </a:extLst>
+</a:theme>
 </file>
--- a/plots/workflow.pptx
+++ b/plots/workflow.pptx
@@ -4086,7 +4086,7 @@
         </p:nvCxnSpPr>
         <p:spPr>
           <a:xfrm>
-            <a:off x="9994711" y="4586871"/>
+            <a:off x="9842311" y="4586871"/>
             <a:ext cx="0" cy="6911299"/>
           </a:xfrm>
           <a:prstGeom prst="straightConnector1">
@@ -4130,7 +4130,7 @@
         </p:nvSpPr>
         <p:spPr>
           <a:xfrm>
-            <a:off x="10188561" y="7392987"/>
+            <a:off x="10074447" y="7392987"/>
             <a:ext cx="3046554" cy="1384995"/>
           </a:xfrm>
           <a:prstGeom prst="rect">

--- a/plots/workflow.pptx
+++ b/plots/workflow.pptx
@@ -3844,6 +3844,10 @@
             </a:endParaRPr>
           </a:p>
           <a:p>
+            <a:pPr marL="457200" indent="-457200">
+              <a:buFontTx/>
+              <a:buChar char="-"/>
+            </a:pPr>
             <a:r>
               <a:rPr lang="en-US" sz="2800" dirty="0">
                 <a:solidFill>
@@ -3857,6 +3861,10 @@
             </a:r>
           </a:p>
           <a:p>
+            <a:pPr marL="457200" indent="-457200">
+              <a:buFontTx/>
+              <a:buChar char="-"/>
+            </a:pPr>
             <a:r>
               <a:rPr lang="en-US" sz="2800" dirty="0">
                 <a:solidFill>
@@ -3866,10 +3874,36 @@
                 <a:ea typeface="EB Garamond Medium" pitchFamily="2" charset="0"/>
                 <a:cs typeface="EB Garamond Medium" pitchFamily="2" charset="0"/>
               </a:rPr>
-              <a:t>Null hypothesis tests</a:t>
-            </a:r>
-          </a:p>
-          <a:p>
+              <a:t>Null </a:t>
+            </a:r>
+            <a:r>
+              <a:rPr lang="en-US" sz="2800">
+                <a:solidFill>
+                  <a:schemeClr val="tx1"/>
+                </a:solidFill>
+                <a:latin typeface="EB Garamond Medium" pitchFamily="2" charset="0"/>
+                <a:ea typeface="EB Garamond Medium" pitchFamily="2" charset="0"/>
+                <a:cs typeface="EB Garamond Medium" pitchFamily="2" charset="0"/>
+              </a:rPr>
+              <a:t>hypothesis tests</a:t>
+            </a:r>
+          </a:p>
+          <a:p>
+            <a:pPr marL="457200" indent="-457200">
+              <a:buFontTx/>
+              <a:buChar char="-"/>
+            </a:pPr>
+            <a:r>
+              <a:rPr lang="en-US" sz="2800">
+                <a:solidFill>
+                  <a:schemeClr val="tx1"/>
+                </a:solidFill>
+                <a:latin typeface="EB Garamond Medium" pitchFamily="2" charset="0"/>
+                <a:ea typeface="EB Garamond Medium" pitchFamily="2" charset="0"/>
+                <a:cs typeface="EB Garamond Medium" pitchFamily="2" charset="0"/>
+              </a:rPr>
+              <a:t>Equivalence </a:t>
+            </a:r>
             <a:r>
               <a:rPr lang="en-US" sz="2800" dirty="0">
                 <a:solidFill>
@@ -3879,7 +3913,7 @@
                 <a:ea typeface="EB Garamond Medium" pitchFamily="2" charset="0"/>
                 <a:cs typeface="EB Garamond Medium" pitchFamily="2" charset="0"/>
               </a:rPr>
-              <a:t>Equivalence tests</a:t>
+              <a:t>tests</a:t>
             </a:r>
           </a:p>
         </p:txBody>
